--- a/presentation/Presentation_Analyse_Optimisation_Marketing.pptx
+++ b/presentation/Presentation_Analyse_Optimisation_Marketing.pptx
@@ -4,6 +4,9 @@
   <p:sldMasterIdLst>
     <p:sldMasterId id="2147483648" r:id="rId1"/>
   </p:sldMasterIdLst>
+  <p:notesMasterIdLst>
+    <p:notesMasterId r:id="rId11"/>
+  </p:notesMasterIdLst>
   <p:sldIdLst>
     <p:sldId id="256" r:id="rId2"/>
     <p:sldId id="257" r:id="rId3"/>
@@ -15,11 +18,8 @@
     <p:sldId id="263" r:id="rId9"/>
     <p:sldId id="264" r:id="rId10"/>
   </p:sldIdLst>
-  <p:notesMasterIdLst>
-    <p:notesMasterId r:id="rId11"/>
-  </p:notesMasterIdLst>
-  <p:sldSz cx="12191695" cy="6858000"/>
-  <p:notesSz cx="6858000" cy="12191695"/>
+  <p:sldSz cx="12192000" cy="6858000"/>
+  <p:notesSz cx="6858000" cy="12192000"/>
   <p:defaultTextStyle>
     <a:lvl1pPr marL="0" algn="l" defTabSz="914400" rtl="0" eaLnBrk="1" latinLnBrk="0" hangingPunct="1">
       <a:defRPr sz="1800" kern="1200">
@@ -112,13 +112,20 @@
       </a:defRPr>
     </a:lvl9pPr>
   </p:defaultTextStyle>
+  <p:extLst>
+    <p:ext uri="{EFAFB233-063F-42B5-8137-9DF3F51BA10A}">
+      <p15:sldGuideLst xmlns:p15="http://schemas.microsoft.com/office/powerpoint/2012/main"/>
+    </p:ext>
+  </p:extLst>
 </p:presentation>
 </file>
 
 <file path=ppt/charts/chart1.xml><?xml version="1.0" encoding="utf-8"?>
-<c:chartSpace xmlns:c="http://schemas.openxmlformats.org/drawingml/2006/chart" xmlns:a="http://schemas.openxmlformats.org/drawingml/2006/main" xmlns:r="http://schemas.openxmlformats.org/officeDocument/2006/relationships">
+<c:chartSpace xmlns:c="http://schemas.openxmlformats.org/drawingml/2006/chart" xmlns:a="http://schemas.openxmlformats.org/drawingml/2006/main" xmlns:r="http://schemas.openxmlformats.org/officeDocument/2006/relationships" xmlns:c16r2="http://schemas.microsoft.com/office/drawing/2015/06/chart">
   <c:date1904 val="0"/>
+  <c:lang val="fr-FR"/>
   <c:roundedCorners val="1"/>
+  <c:style val="2"/>
   <c:chart>
     <c:title>
       <c:tx>
@@ -135,7 +142,7 @@
               </a:defRPr>
             </a:pPr>
             <a:r>
-              <a:rPr sz="1300" b="0" i="0" u="none" strike="noStrike">
+              <a:rPr lang="fr-FR" sz="1300" b="0" i="0" u="none" strike="noStrike">
                 <a:solidFill>
                   <a:srgbClr val="1E2761"/>
                 </a:solidFill>
@@ -146,7 +153,6 @@
           </a:p>
         </c:rich>
       </c:tx>
-      <c:layout/>
       <c:overlay val="0"/>
     </c:title>
     <c:autoTitleDeleted val="0"/>
@@ -179,18 +185,26 @@
           <c:invertIfNegative val="0"/>
           <c:dLbls>
             <c:numFmt formatCode="#,##0" sourceLinked="0"/>
+            <c:spPr>
+              <a:noFill/>
+              <a:ln>
+                <a:noFill/>
+              </a:ln>
+              <a:effectLst/>
+            </c:spPr>
             <c:txPr>
               <a:bodyPr/>
               <a:lstStyle/>
               <a:p>
                 <a:pPr>
-                  <a:defRPr b="0" i="0" strike="noStrike" sz="1000" u="none">
+                  <a:defRPr sz="1000" b="0" i="0" u="none" strike="noStrike">
                     <a:solidFill>
                       <a:srgbClr val="1B1F2A"/>
                     </a:solidFill>
                     <a:latin typeface="Arial"/>
                   </a:defRPr>
                 </a:pPr>
+                <a:endParaRPr lang="fr-MG"/>
               </a:p>
             </c:txPr>
             <c:showLegendKey val="0"/>
@@ -200,31 +214,34 @@
             <c:showPercent val="0"/>
             <c:showBubbleSize val="0"/>
             <c:showLeaderLines val="0"/>
+            <c:extLst>
+              <c:ext xmlns:c15="http://schemas.microsoft.com/office/drawing/2012/chart" uri="{CE6537A1-D6FC-4f65-9D91-7224C49458BB}">
+                <c15:showLeaderLines val="0"/>
+              </c:ext>
+            </c:extLst>
           </c:dLbls>
           <c:cat>
-            <c:multiLvlStrRef>
+            <c:strRef>
               <c:f>Sheet1!$A$2:$A$6</c:f>
-              <c:multiLvlStrCache>
+              <c:strCache>
                 <c:ptCount val="5"/>
-                <c:lvl>
-                  <c:pt idx="0">
-                    <c:v>Online</c:v>
-                  </c:pt>
-                  <c:pt idx="1">
-                    <c:v>In-Store</c:v>
-                  </c:pt>
-                  <c:pt idx="2">
-                    <c:v>Social</c:v>
-                  </c:pt>
-                  <c:pt idx="3">
-                    <c:v>Email</c:v>
-                  </c:pt>
-                  <c:pt idx="4">
-                    <c:v>TV</c:v>
-                  </c:pt>
-                </c:lvl>
-              </c:multiLvlStrCache>
-            </c:multiLvlStrRef>
+                <c:pt idx="0">
+                  <c:v>Online</c:v>
+                </c:pt>
+                <c:pt idx="1">
+                  <c:v>In-Store</c:v>
+                </c:pt>
+                <c:pt idx="2">
+                  <c:v>Social</c:v>
+                </c:pt>
+                <c:pt idx="3">
+                  <c:v>Email</c:v>
+                </c:pt>
+                <c:pt idx="4">
+                  <c:v>TV</c:v>
+                </c:pt>
+              </c:strCache>
+            </c:strRef>
           </c:cat>
           <c:val>
             <c:numRef>
@@ -245,41 +262,28 @@
                   <c:v>5</c:v>
                 </c:pt>
                 <c:pt idx="4">
-                  <c:v>8.3</c:v>
+                  <c:v>8.3000000000000007</c:v>
                 </c:pt>
               </c:numCache>
             </c:numRef>
           </c:val>
+          <c:extLst>
+            <c:ext xmlns:c16="http://schemas.microsoft.com/office/drawing/2014/chart" uri="{C3380CC4-5D6E-409C-BE32-E72D297353CC}">
+              <c16:uniqueId val="{00000000-AC51-4CE3-B536-4091CBAEBFFA}"/>
+            </c:ext>
+          </c:extLst>
         </c:ser>
         <c:dLbls>
-          <c:numFmt formatCode="#,##0" sourceLinked="0"/>
-          <c:txPr>
-            <a:bodyPr/>
-            <a:lstStyle/>
-            <a:p>
-              <a:pPr>
-                <a:defRPr b="0" i="0" strike="noStrike" sz="1000" u="none">
-                  <a:solidFill>
-                    <a:srgbClr val="1B1F2A"/>
-                  </a:solidFill>
-                  <a:latin typeface="Arial"/>
-                </a:defRPr>
-              </a:pPr>
-            </a:p>
-          </c:txPr>
           <c:showLegendKey val="0"/>
           <c:showVal val="1"/>
           <c:showCatName val="0"/>
           <c:showSerName val="0"/>
           <c:showPercent val="0"/>
           <c:showBubbleSize val="0"/>
-          <c:showLeaderLines val="0"/>
         </c:dLbls>
         <c:gapWidth val="150"/>
-        <c:overlap val="0"/>
         <c:axId val="2094734554"/>
         <c:axId val="2094734552"/>
-        <c:axId val="2094734556"/>
       </c:barChart>
       <c:catAx>
         <c:axId val="2094734554"/>
@@ -313,13 +317,14 @@
                 <a:latin typeface="Arial"/>
               </a:defRPr>
             </a:pPr>
-            <a:endParaRPr lang="en-US"/>
+            <a:endParaRPr lang="fr-MG"/>
           </a:p>
         </c:txPr>
         <c:crossAx val="2094734552"/>
         <c:crosses val="autoZero"/>
         <c:auto val="1"/>
         <c:lblAlgn val="ctr"/>
+        <c:lblOffset val="100"/>
         <c:noMultiLvlLbl val="1"/>
       </c:catAx>
       <c:valAx>
@@ -365,7 +370,7 @@
                 <a:latin typeface="Arial"/>
               </a:defRPr>
             </a:pPr>
-            <a:endParaRPr lang="en-US"/>
+            <a:endParaRPr lang="fr-MG"/>
           </a:p>
         </c:txPr>
         <c:crossAx val="2094734554"/>
@@ -384,6 +389,7 @@
     </c:plotArea>
     <c:plotVisOnly val="1"/>
     <c:dispBlanksAs val="span"/>
+    <c:showDLblsOverMax val="1"/>
   </c:chart>
   <c:spPr>
     <a:solidFill>
@@ -422,234 +428,10 @@
           <a:chExt cx="0" cy="0"/>
         </a:xfrm>
       </p:grpSpPr>
-      <p:sp>
-        <p:nvSpPr>
-          <p:cNvPr id="2" name="Header Placeholder 1"/>
-          <p:cNvSpPr>
-            <a:spLocks noGrp="1"/>
-          </p:cNvSpPr>
-          <p:nvPr>
-            <p:ph type="hdr" sz="quarter"/>
-          </p:nvPr>
-        </p:nvSpPr>
-        <p:spPr>
-          <a:xfrm>
-            <a:off x="0" y="0"/>
-            <a:ext cx="2971800" cy="458788"/>
-          </a:xfrm>
-          <a:prstGeom prst="rect">
-            <a:avLst/>
-          </a:prstGeom>
-        </p:spPr>
-        <p:txBody>
-          <a:bodyPr vert="horz" lIns="91440" tIns="45720" rIns="91440" bIns="45720" rtlCol="0"/>
-          <a:lstStyle>
-            <a:lvl1pPr algn="l">
-              <a:defRPr sz="1200"/>
-            </a:lvl1pPr>
-          </a:lstStyle>
-          <a:p>
-            <a:endParaRPr lang="en-US"/>
-          </a:p>
-        </p:txBody>
-      </p:sp>
-      <p:sp>
-        <p:nvSpPr>
-          <p:cNvPr id="3" name="Date Placeholder 2"/>
-          <p:cNvSpPr>
-            <a:spLocks noGrp="1"/>
-          </p:cNvSpPr>
-          <p:nvPr>
-            <p:ph type="dt" idx="1"/>
-          </p:nvPr>
-        </p:nvSpPr>
-        <p:spPr>
-          <a:xfrm>
-            <a:off x="3884613" y="0"/>
-            <a:ext cx="2971800" cy="458788"/>
-          </a:xfrm>
-          <a:prstGeom prst="rect">
-            <a:avLst/>
-          </a:prstGeom>
-        </p:spPr>
-        <p:txBody>
-          <a:bodyPr vert="horz" lIns="91440" tIns="45720" rIns="91440" bIns="45720" rtlCol="0"/>
-          <a:lstStyle>
-            <a:lvl1pPr algn="r">
-              <a:defRPr sz="1200"/>
-            </a:lvl1pPr>
-          </a:lstStyle>
-          <a:p>
-            <a:fld id="{5282F153-3F37-0F45-9E97-73ACFA13230C}" type="datetimeFigureOut">
-              <a:rPr lang="en-US"/>
-              <a:t>7/23/19</a:t>
-            </a:fld>
-            <a:endParaRPr lang="en-US"/>
-          </a:p>
-        </p:txBody>
-      </p:sp>
-      <p:sp>
-        <p:nvSpPr>
-          <p:cNvPr id="4" name="Slide Image Placeholder 3"/>
-          <p:cNvSpPr>
-            <a:spLocks noGrp="1" noRot="1" noChangeAspect="1"/>
-          </p:cNvSpPr>
-          <p:nvPr>
-            <p:ph type="sldImg" idx="2"/>
-          </p:nvPr>
-        </p:nvSpPr>
-        <p:spPr>
-          <a:xfrm>
-            <a:off x="685800" y="1143000"/>
-            <a:ext cx="5486400" cy="3086100"/>
-          </a:xfrm>
-          <a:prstGeom prst="rect">
-            <a:avLst/>
-          </a:prstGeom>
-          <a:noFill/>
-          <a:ln w="12700">
-            <a:solidFill>
-              <a:prstClr val="black"/>
-            </a:solidFill>
-          </a:ln>
-        </p:spPr>
-        <p:txBody>
-          <a:bodyPr vert="horz" lIns="91440" tIns="45720" rIns="91440" bIns="45720" rtlCol="0" anchor="ctr"/>
-          <a:lstStyle/>
-          <a:p>
-            <a:endParaRPr lang="en-US"/>
-          </a:p>
-        </p:txBody>
-      </p:sp>
-      <p:sp>
-        <p:nvSpPr>
-          <p:cNvPr id="5" name="Notes Placeholder 4"/>
-          <p:cNvSpPr>
-            <a:spLocks noGrp="1"/>
-          </p:cNvSpPr>
-          <p:nvPr>
-            <p:ph type="body" sz="quarter" idx="3"/>
-          </p:nvPr>
-        </p:nvSpPr>
-        <p:spPr>
-          <a:xfrm>
-            <a:off x="685800" y="4400550"/>
-            <a:ext cx="5486400" cy="3600450"/>
-          </a:xfrm>
-          <a:prstGeom prst="rect">
-            <a:avLst/>
-          </a:prstGeom>
-        </p:spPr>
-        <p:txBody>
-          <a:bodyPr vert="horz" lIns="91440" tIns="45720" rIns="91440" bIns="45720" rtlCol="0"/>
-          <a:lstStyle/>
-          <a:p>
-            <a:pPr lvl="0"/>
-            <a:r>
-              <a:rPr lang="en-US"/>
-              <a:t>Click to edit Master text styles</a:t>
-            </a:r>
-          </a:p>
-          <a:p>
-            <a:pPr lvl="1"/>
-            <a:r>
-              <a:rPr lang="en-US"/>
-              <a:t>Second level</a:t>
-            </a:r>
-          </a:p>
-          <a:p>
-            <a:pPr lvl="2"/>
-            <a:r>
-              <a:rPr lang="en-US"/>
-              <a:t>Third level</a:t>
-            </a:r>
-          </a:p>
-          <a:p>
-            <a:pPr lvl="3"/>
-            <a:r>
-              <a:rPr lang="en-US"/>
-              <a:t>Fourth level</a:t>
-            </a:r>
-          </a:p>
-          <a:p>
-            <a:pPr lvl="4"/>
-            <a:r>
-              <a:rPr lang="en-US"/>
-              <a:t>Fifth level</a:t>
-            </a:r>
-          </a:p>
-        </p:txBody>
-      </p:sp>
-      <p:sp>
-        <p:nvSpPr>
-          <p:cNvPr id="6" name="Footer Placeholder 5"/>
-          <p:cNvSpPr>
-            <a:spLocks noGrp="1"/>
-          </p:cNvSpPr>
-          <p:nvPr>
-            <p:ph type="ftr" sz="quarter" idx="4"/>
-          </p:nvPr>
-        </p:nvSpPr>
-        <p:spPr>
-          <a:xfrm>
-            <a:off x="0" y="8685213"/>
-            <a:ext cx="2971800" cy="458787"/>
-          </a:xfrm>
-          <a:prstGeom prst="rect">
-            <a:avLst/>
-          </a:prstGeom>
-        </p:spPr>
-        <p:txBody>
-          <a:bodyPr vert="horz" lIns="91440" tIns="45720" rIns="91440" bIns="45720" rtlCol="0" anchor="b"/>
-          <a:lstStyle>
-            <a:lvl1pPr algn="l">
-              <a:defRPr sz="1200"/>
-            </a:lvl1pPr>
-          </a:lstStyle>
-          <a:p>
-            <a:endParaRPr lang="en-US"/>
-          </a:p>
-        </p:txBody>
-      </p:sp>
-      <p:sp>
-        <p:nvSpPr>
-          <p:cNvPr id="7" name="Slide Number Placeholder 6"/>
-          <p:cNvSpPr>
-            <a:spLocks noGrp="1"/>
-          </p:cNvSpPr>
-          <p:nvPr>
-            <p:ph type="sldNum" sz="quarter" idx="5"/>
-          </p:nvPr>
-        </p:nvSpPr>
-        <p:spPr>
-          <a:xfrm>
-            <a:off x="3884613" y="8685213"/>
-            <a:ext cx="2971800" cy="458787"/>
-          </a:xfrm>
-          <a:prstGeom prst="rect">
-            <a:avLst/>
-          </a:prstGeom>
-        </p:spPr>
-        <p:txBody>
-          <a:bodyPr vert="horz" lIns="91440" tIns="45720" rIns="91440" bIns="45720" rtlCol="0" anchor="b"/>
-          <a:lstStyle>
-            <a:lvl1pPr algn="r">
-              <a:defRPr sz="1200"/>
-            </a:lvl1pPr>
-          </a:lstStyle>
-          <a:p>
-            <a:fld id="{CE5E9CC1-C706-0F49-92D6-E571CC5EEA8F}" type="slidenum">
-              <a:rPr lang="en-US"/>
-              <a:t>‹#›</a:t>
-            </a:fld>
-            <a:endParaRPr lang="en-US"/>
-          </a:p>
-        </p:txBody>
-      </p:sp>
     </p:spTree>
     <p:extLst>
       <p:ext uri="{BB962C8B-B14F-4D97-AF65-F5344CB8AC3E}">
-        <p14:creationId xmlns:p14="http://schemas.microsoft.com/office/powerpoint/2010/main" val="1024086991"/>
+        <p14:creationId xmlns:p14="http://schemas.microsoft.com/office/powerpoint/2010/main" val="3320840575"/>
       </p:ext>
     </p:extLst>
   </p:cSld>
@@ -793,10 +575,6 @@
           <a:bodyPr/>
           <a:lstStyle/>
           <a:p>
-            <a:r>
-              <a:rPr lang="en-US" dirty="0"/>
-              <a:t/>
-            </a:r>
             <a:endParaRPr lang="en-US" dirty="0"/>
           </a:p>
         </p:txBody>
@@ -881,10 +659,6 @@
           <a:bodyPr/>
           <a:lstStyle/>
           <a:p>
-            <a:r>
-              <a:rPr lang="en-US" dirty="0"/>
-              <a:t/>
-            </a:r>
             <a:endParaRPr lang="en-US" dirty="0"/>
           </a:p>
         </p:txBody>
@@ -969,10 +743,6 @@
           <a:bodyPr/>
           <a:lstStyle/>
           <a:p>
-            <a:r>
-              <a:rPr lang="en-US" dirty="0"/>
-              <a:t/>
-            </a:r>
             <a:endParaRPr lang="en-US" dirty="0"/>
           </a:p>
         </p:txBody>
@@ -1057,10 +827,6 @@
           <a:bodyPr/>
           <a:lstStyle/>
           <a:p>
-            <a:r>
-              <a:rPr lang="en-US" dirty="0"/>
-              <a:t/>
-            </a:r>
             <a:endParaRPr lang="en-US" dirty="0"/>
           </a:p>
         </p:txBody>
@@ -1145,10 +911,6 @@
           <a:bodyPr/>
           <a:lstStyle/>
           <a:p>
-            <a:r>
-              <a:rPr lang="en-US" dirty="0"/>
-              <a:t/>
-            </a:r>
             <a:endParaRPr lang="en-US" dirty="0"/>
           </a:p>
         </p:txBody>
@@ -1233,10 +995,6 @@
           <a:bodyPr/>
           <a:lstStyle/>
           <a:p>
-            <a:r>
-              <a:rPr lang="en-US" dirty="0"/>
-              <a:t/>
-            </a:r>
             <a:endParaRPr lang="en-US" dirty="0"/>
           </a:p>
         </p:txBody>
@@ -1321,10 +1079,6 @@
           <a:bodyPr/>
           <a:lstStyle/>
           <a:p>
-            <a:r>
-              <a:rPr lang="en-US" dirty="0"/>
-              <a:t/>
-            </a:r>
             <a:endParaRPr lang="en-US" dirty="0"/>
           </a:p>
         </p:txBody>
@@ -1409,10 +1163,6 @@
           <a:bodyPr/>
           <a:lstStyle/>
           <a:p>
-            <a:r>
-              <a:rPr lang="en-US" dirty="0"/>
-              <a:t/>
-            </a:r>
             <a:endParaRPr lang="en-US" dirty="0"/>
           </a:p>
         </p:txBody>
@@ -1497,10 +1247,6 @@
           <a:bodyPr/>
           <a:lstStyle/>
           <a:p>
-            <a:r>
-              <a:rPr lang="en-US" dirty="0"/>
-              <a:t/>
-            </a:r>
             <a:endParaRPr lang="en-US" dirty="0"/>
           </a:p>
         </p:txBody>
@@ -1574,6 +1320,11 @@
 <file path=ppt/slideMasters/slideMaster1.xml><?xml version="1.0" encoding="utf-8"?>
 <p:sldMaster xmlns:a="http://schemas.openxmlformats.org/drawingml/2006/main" xmlns:r="http://schemas.openxmlformats.org/officeDocument/2006/relationships" xmlns:p="http://schemas.openxmlformats.org/presentationml/2006/main">
   <p:cSld>
+    <p:bg>
+      <p:bgRef idx="1001">
+        <a:schemeClr val="bg1"/>
+      </p:bgRef>
+    </p:bg>
     <p:spTree>
       <p:nvGrpSpPr>
         <p:cNvPr id="1" name=""/>
@@ -1856,6 +1607,7 @@
         <a:solidFill>
           <a:srgbClr val="1E2761"/>
         </a:solidFill>
+        <a:effectLst/>
       </p:bgPr>
     </p:bg>
     <p:spTree>
@@ -1874,14 +1626,14 @@
       </p:grpSpPr>
       <p:pic>
         <p:nvPicPr>
-          <p:cNvPr id="2" name="Image 0" descr="logo_uf.png">    </p:cNvPr>
+          <p:cNvPr id="2" name="Image 0" descr="logo_uf.png"/>
           <p:cNvPicPr>
             <a:picLocks noChangeAspect="1"/>
           </p:cNvPicPr>
           <p:nvPr/>
         </p:nvPicPr>
         <p:blipFill>
-          <a:blip r:embed="rId1"/>
+          <a:blip r:embed="rId3"/>
           <a:stretch>
             <a:fillRect/>
           </a:stretch>
@@ -1898,14 +1650,14 @@
       </p:pic>
       <p:pic>
         <p:nvPicPr>
-          <p:cNvPr id="3" name="Image 1" descr="logo_eni.jpeg">    </p:cNvPr>
+          <p:cNvPr id="3" name="Image 1" descr="logo_eni.jpeg"/>
           <p:cNvPicPr>
             <a:picLocks noChangeAspect="1"/>
           </p:cNvPicPr>
           <p:nvPr/>
         </p:nvPicPr>
         <p:blipFill>
-          <a:blip r:embed="rId2"/>
+          <a:blip r:embed="rId4"/>
           <a:stretch>
             <a:fillRect/>
           </a:stretch>
@@ -1941,7 +1693,7 @@
           <a:bodyPr wrap="square" rtlCol="0" anchor="ctr"/>
           <a:lstStyle/>
           <a:p>
-            <a:pPr algn="ctr" indent="0" marL="0">
+            <a:pPr marL="0" indent="0" algn="ctr">
               <a:buNone/>
             </a:pPr>
             <a:r>
@@ -1980,7 +1732,7 @@
           <a:bodyPr wrap="square" rtlCol="0" anchor="ctr"/>
           <a:lstStyle/>
           <a:p>
-            <a:pPr algn="ctr" indent="0" marL="0">
+            <a:pPr marL="0" indent="0" algn="ctr">
               <a:buNone/>
             </a:pPr>
             <a:r>
@@ -2019,7 +1771,7 @@
           <a:bodyPr wrap="square" rtlCol="0" anchor="ctr"/>
           <a:lstStyle/>
           <a:p>
-            <a:pPr algn="ctr" indent="0" marL="0">
+            <a:pPr marL="0" indent="0" algn="ctr">
               <a:buNone/>
             </a:pPr>
             <a:r>
@@ -2031,7 +1783,7 @@
                 <a:ea typeface="Calibri" pitchFamily="34" charset="-122"/>
                 <a:cs typeface="Calibri" pitchFamily="34" charset="-120"/>
               </a:rPr>
-              <a:t>Mention : Intelligence Artificielle   |   Parcours : ……………………</a:t>
+              <a:t>Mention : Intelligence Artificielle   |   Parcours : GID/OCC</a:t>
             </a:r>
             <a:endParaRPr lang="en-US" sz="1300" dirty="0"/>
           </a:p>
@@ -2058,7 +1810,7 @@
           <a:bodyPr wrap="square" rtlCol="0" anchor="ctr"/>
           <a:lstStyle/>
           <a:p>
-            <a:pPr algn="ctr" indent="0" marL="0">
+            <a:pPr marL="0" indent="0" algn="ctr">
               <a:buNone/>
             </a:pPr>
             <a:r>
@@ -2097,7 +1849,7 @@
           <a:bodyPr wrap="square" rtlCol="0" anchor="ctr"/>
           <a:lstStyle/>
           <a:p>
-            <a:pPr algn="ctr" indent="0" marL="0">
+            <a:pPr marL="0" indent="0" algn="ctr">
               <a:buNone/>
             </a:pPr>
             <a:r>
@@ -2136,7 +1888,7 @@
           <a:bodyPr wrap="square" rtlCol="0" anchor="ctr"/>
           <a:lstStyle/>
           <a:p>
-            <a:pPr algn="ctr" indent="0" marL="0">
+            <a:pPr marL="0" indent="0" algn="ctr">
               <a:buNone/>
             </a:pPr>
             <a:r>
@@ -2148,46 +1900,57 @@
                 <a:ea typeface="Calibri" pitchFamily="34" charset="-122"/>
                 <a:cs typeface="Calibri" pitchFamily="34" charset="-120"/>
               </a:rPr>
-              <a:t>Présenté par le groupe : ……………………………………………………………………………</a:t>
-            </a:r>
-            <a:endParaRPr lang="en-US" sz="1300" dirty="0"/>
-          </a:p>
-        </p:txBody>
-      </p:sp>
-      <p:sp>
-        <p:nvSpPr>
-          <p:cNvPr id="10" name="Text 6"/>
-          <p:cNvSpPr/>
-          <p:nvPr/>
-        </p:nvSpPr>
-        <p:spPr>
-          <a:xfrm>
-            <a:off x="0" y="5623560"/>
-            <a:ext cx="12191695" cy="320040"/>
-          </a:xfrm>
-          <a:prstGeom prst="rect">
-            <a:avLst/>
-          </a:prstGeom>
-          <a:noFill/>
-          <a:ln/>
-        </p:spPr>
-        <p:txBody>
-          <a:bodyPr wrap="square" rtlCol="0" anchor="ctr"/>
-          <a:lstStyle/>
-          <a:p>
-            <a:pPr algn="ctr" indent="0" marL="0">
-              <a:buNone/>
-            </a:pPr>
-            <a:r>
-              <a:rPr lang="en-US" sz="1200" dirty="0">
-                <a:solidFill>
-                  <a:srgbClr val="8892B0"/>
+              <a:t>Présenté par le groupe </a:t>
+            </a:r>
+            <a:r>
+              <a:rPr lang="en-US" sz="1300">
+                <a:solidFill>
+                  <a:srgbClr val="FFFFFF"/>
                 </a:solidFill>
                 <a:latin typeface="Calibri" pitchFamily="34" charset="0"/>
                 <a:ea typeface="Calibri" pitchFamily="34" charset="-122"/>
                 <a:cs typeface="Calibri" pitchFamily="34" charset="-120"/>
               </a:rPr>
-              <a:t>Année universitaire : ……………… – ………………</a:t>
+              <a:t>: 14</a:t>
+            </a:r>
+            <a:endParaRPr lang="en-US" sz="1300" dirty="0"/>
+          </a:p>
+        </p:txBody>
+      </p:sp>
+      <p:sp>
+        <p:nvSpPr>
+          <p:cNvPr id="10" name="Text 6"/>
+          <p:cNvSpPr/>
+          <p:nvPr/>
+        </p:nvSpPr>
+        <p:spPr>
+          <a:xfrm>
+            <a:off x="0" y="5623560"/>
+            <a:ext cx="12191695" cy="320040"/>
+          </a:xfrm>
+          <a:prstGeom prst="rect">
+            <a:avLst/>
+          </a:prstGeom>
+          <a:noFill/>
+          <a:ln/>
+        </p:spPr>
+        <p:txBody>
+          <a:bodyPr wrap="square" rtlCol="0" anchor="ctr"/>
+          <a:lstStyle/>
+          <a:p>
+            <a:pPr marL="0" indent="0" algn="ctr">
+              <a:buNone/>
+            </a:pPr>
+            <a:r>
+              <a:rPr lang="en-US" sz="1200" dirty="0">
+                <a:solidFill>
+                  <a:srgbClr val="8892B0"/>
+                </a:solidFill>
+                <a:latin typeface="Calibri" pitchFamily="34" charset="0"/>
+                <a:ea typeface="Calibri" pitchFamily="34" charset="-122"/>
+                <a:cs typeface="Calibri" pitchFamily="34" charset="-120"/>
+              </a:rPr>
+              <a:t>Année universitaire : 2025 – 2026</a:t>
             </a:r>
             <a:endParaRPr lang="en-US" sz="1200" dirty="0"/>
           </a:p>
@@ -2209,6 +1972,7 @@
         <a:solidFill>
           <a:srgbClr val="FFFFFF"/>
         </a:solidFill>
+        <a:effectLst/>
       </p:bgPr>
     </p:bg>
     <p:spTree>
@@ -2246,7 +2010,7 @@
           <a:bodyPr wrap="square" rtlCol="0" anchor="ctr"/>
           <a:lstStyle/>
           <a:p>
-            <a:pPr indent="0" marL="0">
+            <a:pPr marL="0" indent="0">
               <a:buNone/>
             </a:pPr>
             <a:r>
@@ -2285,7 +2049,7 @@
           <a:bodyPr wrap="square" rtlCol="0" anchor="ctr"/>
           <a:lstStyle/>
           <a:p>
-            <a:pPr indent="0" marL="0">
+            <a:pPr marL="0" indent="0">
               <a:buNone/>
             </a:pPr>
             <a:r>
@@ -2324,7 +2088,7 @@
           </a:solidFill>
           <a:ln/>
           <a:effectLst>
-            <a:outerShdw sx="100000" sy="100000" kx="0" ky="0" algn="bl" rotWithShape="0" blurRad="76200" dist="25400" dir="5400000">
+            <a:outerShdw blurRad="76200" dist="25400" dir="5400000" algn="bl" rotWithShape="0">
               <a:srgbClr val="8A94B8">
                 <a:alpha val="18000"/>
               </a:srgbClr>
@@ -2354,309 +2118,7 @@
       </p:sp>
       <p:pic>
         <p:nvPicPr>
-          <p:cNvPr id="6" name="Image 0" descr="icon_users.png">    </p:cNvPr>
-          <p:cNvPicPr>
-            <a:picLocks noChangeAspect="1"/>
-          </p:cNvPicPr>
-          <p:nvPr/>
-        </p:nvPicPr>
-        <p:blipFill>
-          <a:blip r:embed="rId1"/>
-          <a:stretch>
-            <a:fillRect/>
-          </a:stretch>
-        </p:blipFill>
-        <p:spPr>
-          <a:xfrm>
-            <a:off x="1687068" y="2372868"/>
-            <a:ext cx="329184" cy="329184"/>
-          </a:xfrm>
-          <a:prstGeom prst="rect">
-            <a:avLst/>
-          </a:prstGeom>
-        </p:spPr>
-      </p:pic>
-      <p:sp>
-        <p:nvSpPr>
-          <p:cNvPr id="7" name="Text 4"/>
-          <p:cNvSpPr/>
-          <p:nvPr/>
-        </p:nvSpPr>
-        <p:spPr>
-          <a:xfrm>
-            <a:off x="713232" y="3108960"/>
-            <a:ext cx="2276856" cy="685800"/>
-          </a:xfrm>
-          <a:prstGeom prst="rect">
-            <a:avLst/>
-          </a:prstGeom>
-          <a:noFill/>
-          <a:ln/>
-        </p:spPr>
-        <p:txBody>
-          <a:bodyPr wrap="square" rtlCol="0" anchor="t"/>
-          <a:lstStyle/>
-          <a:p>
-            <a:pPr algn="ctr" indent="0" marL="0">
-              <a:buNone/>
-            </a:pPr>
-            <a:r>
-              <a:rPr lang="en-US" sz="1400" b="1" dirty="0">
-                <a:solidFill>
-                  <a:srgbClr val="1E2761"/>
-                </a:solidFill>
-                <a:latin typeface="Calibri" pitchFamily="34" charset="0"/>
-                <a:ea typeface="Calibri" pitchFamily="34" charset="-122"/>
-                <a:cs typeface="Calibri" pitchFamily="34" charset="-120"/>
-              </a:rPr>
-              <a:t>Segmenter la clientèle</a:t>
-            </a:r>
-            <a:endParaRPr lang="en-US" sz="1400" dirty="0"/>
-          </a:p>
-        </p:txBody>
-      </p:sp>
-      <p:sp>
-        <p:nvSpPr>
-          <p:cNvPr id="8" name="Text 5"/>
-          <p:cNvSpPr/>
-          <p:nvPr/>
-        </p:nvSpPr>
-        <p:spPr>
-          <a:xfrm>
-            <a:off x="749808" y="3840480"/>
-            <a:ext cx="2203704" cy="1371600"/>
-          </a:xfrm>
-          <a:prstGeom prst="rect">
-            <a:avLst/>
-          </a:prstGeom>
-          <a:noFill/>
-          <a:ln/>
-        </p:spPr>
-        <p:txBody>
-          <a:bodyPr wrap="square" rtlCol="0" anchor="t"/>
-          <a:lstStyle/>
-          <a:p>
-            <a:pPr algn="ctr" indent="0" marL="0">
-              <a:buNone/>
-            </a:pPr>
-            <a:r>
-              <a:rPr lang="en-US" sz="1150" dirty="0">
-                <a:solidFill>
-                  <a:srgbClr val="5B6270"/>
-                </a:solidFill>
-                <a:latin typeface="Calibri" pitchFamily="34" charset="0"/>
-                <a:ea typeface="Calibri" pitchFamily="34" charset="-122"/>
-                <a:cs typeface="Calibri" pitchFamily="34" charset="-120"/>
-              </a:rPr>
-              <a:t>À partir des données clients et de leur historique de ventes.</a:t>
-            </a:r>
-            <a:endParaRPr lang="en-US" sz="1150" dirty="0"/>
-          </a:p>
-        </p:txBody>
-      </p:sp>
-      <p:sp>
-        <p:nvSpPr>
-          <p:cNvPr id="9" name="Shape 6"/>
-          <p:cNvSpPr/>
-          <p:nvPr/>
-        </p:nvSpPr>
-        <p:spPr>
-          <a:xfrm>
-            <a:off x="3364992" y="1874520"/>
-            <a:ext cx="2606040" cy="3566160"/>
-          </a:xfrm>
-          <a:prstGeom prst="roundRect">
-            <a:avLst>
-              <a:gd name="adj" fmla="val 2807"/>
-            </a:avLst>
-          </a:prstGeom>
-          <a:solidFill>
-            <a:srgbClr val="F5F7FB"/>
-          </a:solidFill>
-          <a:ln/>
-          <a:effectLst>
-            <a:outerShdw sx="100000" sy="100000" kx="0" ky="0" algn="bl" rotWithShape="0" blurRad="76200" dist="25400" dir="5400000">
-              <a:srgbClr val="8A94B8">
-                <a:alpha val="18000"/>
-              </a:srgbClr>
-            </a:outerShdw>
-          </a:effectLst>
-        </p:spPr>
-      </p:sp>
-      <p:sp>
-        <p:nvSpPr>
-          <p:cNvPr id="10" name="Shape 7"/>
-          <p:cNvSpPr/>
-          <p:nvPr/>
-        </p:nvSpPr>
-        <p:spPr>
-          <a:xfrm>
-            <a:off x="4325112" y="2194560"/>
-            <a:ext cx="685800" cy="685800"/>
-          </a:xfrm>
-          <a:prstGeom prst="ellipse">
-            <a:avLst/>
-          </a:prstGeom>
-          <a:solidFill>
-            <a:srgbClr val="1E2761"/>
-          </a:solidFill>
-          <a:ln/>
-        </p:spPr>
-      </p:sp>
-      <p:pic>
-        <p:nvPicPr>
-          <p:cNvPr id="11" name="Image 1" descr="icon_bag.png">    </p:cNvPr>
-          <p:cNvPicPr>
-            <a:picLocks noChangeAspect="1"/>
-          </p:cNvPicPr>
-          <p:nvPr/>
-        </p:nvPicPr>
-        <p:blipFill>
-          <a:blip r:embed="rId2"/>
-          <a:stretch>
-            <a:fillRect/>
-          </a:stretch>
-        </p:blipFill>
-        <p:spPr>
-          <a:xfrm>
-            <a:off x="4503420" y="2372868"/>
-            <a:ext cx="329184" cy="329184"/>
-          </a:xfrm>
-          <a:prstGeom prst="rect">
-            <a:avLst/>
-          </a:prstGeom>
-        </p:spPr>
-      </p:pic>
-      <p:sp>
-        <p:nvSpPr>
-          <p:cNvPr id="12" name="Text 8"/>
-          <p:cNvSpPr/>
-          <p:nvPr/>
-        </p:nvSpPr>
-        <p:spPr>
-          <a:xfrm>
-            <a:off x="3529584" y="3108960"/>
-            <a:ext cx="2276856" cy="685800"/>
-          </a:xfrm>
-          <a:prstGeom prst="rect">
-            <a:avLst/>
-          </a:prstGeom>
-          <a:noFill/>
-          <a:ln/>
-        </p:spPr>
-        <p:txBody>
-          <a:bodyPr wrap="square" rtlCol="0" anchor="t"/>
-          <a:lstStyle/>
-          <a:p>
-            <a:pPr algn="ctr" indent="0" marL="0">
-              <a:buNone/>
-            </a:pPr>
-            <a:r>
-              <a:rPr lang="en-US" sz="1400" b="1" dirty="0">
-                <a:solidFill>
-                  <a:srgbClr val="1E2761"/>
-                </a:solidFill>
-                <a:latin typeface="Calibri" pitchFamily="34" charset="0"/>
-                <a:ea typeface="Calibri" pitchFamily="34" charset="-122"/>
-                <a:cs typeface="Calibri" pitchFamily="34" charset="-120"/>
-              </a:rPr>
-              <a:t>Analyser le comportement d'achat</a:t>
-            </a:r>
-            <a:endParaRPr lang="en-US" sz="1400" dirty="0"/>
-          </a:p>
-        </p:txBody>
-      </p:sp>
-      <p:sp>
-        <p:nvSpPr>
-          <p:cNvPr id="13" name="Text 9"/>
-          <p:cNvSpPr/>
-          <p:nvPr/>
-        </p:nvSpPr>
-        <p:spPr>
-          <a:xfrm>
-            <a:off x="3566160" y="3840480"/>
-            <a:ext cx="2203704" cy="1371600"/>
-          </a:xfrm>
-          <a:prstGeom prst="rect">
-            <a:avLst/>
-          </a:prstGeom>
-          <a:noFill/>
-          <a:ln/>
-        </p:spPr>
-        <p:txBody>
-          <a:bodyPr wrap="square" rtlCol="0" anchor="t"/>
-          <a:lstStyle/>
-          <a:p>
-            <a:pPr algn="ctr" indent="0" marL="0">
-              <a:buNone/>
-            </a:pPr>
-            <a:r>
-              <a:rPr lang="en-US" sz="1150" dirty="0">
-                <a:solidFill>
-                  <a:srgbClr val="5B6270"/>
-                </a:solidFill>
-                <a:latin typeface="Calibri" pitchFamily="34" charset="0"/>
-                <a:ea typeface="Calibri" pitchFamily="34" charset="-122"/>
-                <a:cs typeface="Calibri" pitchFamily="34" charset="-120"/>
-              </a:rPr>
-              <a:t>Produits achetés, fréquence, canaux privilégiés.</a:t>
-            </a:r>
-            <a:endParaRPr lang="en-US" sz="1150" dirty="0"/>
-          </a:p>
-        </p:txBody>
-      </p:sp>
-      <p:sp>
-        <p:nvSpPr>
-          <p:cNvPr id="14" name="Shape 10"/>
-          <p:cNvSpPr/>
-          <p:nvPr/>
-        </p:nvSpPr>
-        <p:spPr>
-          <a:xfrm>
-            <a:off x="6181344" y="1874520"/>
-            <a:ext cx="2606040" cy="3566160"/>
-          </a:xfrm>
-          <a:prstGeom prst="roundRect">
-            <a:avLst>
-              <a:gd name="adj" fmla="val 2807"/>
-            </a:avLst>
-          </a:prstGeom>
-          <a:solidFill>
-            <a:srgbClr val="F5F7FB"/>
-          </a:solidFill>
-          <a:ln/>
-          <a:effectLst>
-            <a:outerShdw sx="100000" sy="100000" kx="0" ky="0" algn="bl" rotWithShape="0" blurRad="76200" dist="25400" dir="5400000">
-              <a:srgbClr val="8A94B8">
-                <a:alpha val="18000"/>
-              </a:srgbClr>
-            </a:outerShdw>
-          </a:effectLst>
-        </p:spPr>
-      </p:sp>
-      <p:sp>
-        <p:nvSpPr>
-          <p:cNvPr id="15" name="Shape 11"/>
-          <p:cNvSpPr/>
-          <p:nvPr/>
-        </p:nvSpPr>
-        <p:spPr>
-          <a:xfrm>
-            <a:off x="7141464" y="2194560"/>
-            <a:ext cx="685800" cy="685800"/>
-          </a:xfrm>
-          <a:prstGeom prst="ellipse">
-            <a:avLst/>
-          </a:prstGeom>
-          <a:solidFill>
-            <a:srgbClr val="1E2761"/>
-          </a:solidFill>
-          <a:ln/>
-        </p:spPr>
-      </p:sp>
-      <p:pic>
-        <p:nvPicPr>
-          <p:cNvPr id="16" name="Image 2" descr="icon_trending.png">    </p:cNvPr>
+          <p:cNvPr id="6" name="Image 0" descr="icon_users.png"/>
           <p:cNvPicPr>
             <a:picLocks noChangeAspect="1"/>
           </p:cNvPicPr>
@@ -2670,7 +2132,7 @@
         </p:blipFill>
         <p:spPr>
           <a:xfrm>
-            <a:off x="7319772" y="2372868"/>
+            <a:off x="1687068" y="2372868"/>
             <a:ext cx="329184" cy="329184"/>
           </a:xfrm>
           <a:prstGeom prst="rect">
@@ -2680,13 +2142,13 @@
       </p:pic>
       <p:sp>
         <p:nvSpPr>
-          <p:cNvPr id="17" name="Text 12"/>
-          <p:cNvSpPr/>
-          <p:nvPr/>
-        </p:nvSpPr>
-        <p:spPr>
-          <a:xfrm>
-            <a:off x="6345936" y="3108960"/>
+          <p:cNvPr id="7" name="Text 4"/>
+          <p:cNvSpPr/>
+          <p:nvPr/>
+        </p:nvSpPr>
+        <p:spPr>
+          <a:xfrm>
+            <a:off x="713232" y="3108960"/>
             <a:ext cx="2276856" cy="685800"/>
           </a:xfrm>
           <a:prstGeom prst="rect">
@@ -2699,7 +2161,7 @@
           <a:bodyPr wrap="square" rtlCol="0" anchor="t"/>
           <a:lstStyle/>
           <a:p>
-            <a:pPr algn="ctr" indent="0" marL="0">
+            <a:pPr marL="0" indent="0" algn="ctr">
               <a:buNone/>
             </a:pPr>
             <a:r>
@@ -2711,7 +2173,7 @@
                 <a:ea typeface="Calibri" pitchFamily="34" charset="-122"/>
                 <a:cs typeface="Calibri" pitchFamily="34" charset="-120"/>
               </a:rPr>
-              <a:t>Évaluer les campagnes</a:t>
+              <a:t>Segmenter la clientèle</a:t>
             </a:r>
             <a:endParaRPr lang="en-US" sz="1400" dirty="0"/>
           </a:p>
@@ -2719,13 +2181,13 @@
       </p:sp>
       <p:sp>
         <p:nvSpPr>
-          <p:cNvPr id="18" name="Text 13"/>
-          <p:cNvSpPr/>
-          <p:nvPr/>
-        </p:nvSpPr>
-        <p:spPr>
-          <a:xfrm>
-            <a:off x="6382512" y="3840480"/>
+          <p:cNvPr id="8" name="Text 5"/>
+          <p:cNvSpPr/>
+          <p:nvPr/>
+        </p:nvSpPr>
+        <p:spPr>
+          <a:xfrm>
+            <a:off x="749808" y="3840480"/>
             <a:ext cx="2203704" cy="1371600"/>
           </a:xfrm>
           <a:prstGeom prst="rect">
@@ -2738,7 +2200,7 @@
           <a:bodyPr wrap="square" rtlCol="0" anchor="t"/>
           <a:lstStyle/>
           <a:p>
-            <a:pPr algn="ctr" indent="0" marL="0">
+            <a:pPr marL="0" indent="0" algn="ctr">
               <a:buNone/>
             </a:pPr>
             <a:r>
@@ -2750,7 +2212,7 @@
                 <a:ea typeface="Calibri" pitchFamily="34" charset="-122"/>
                 <a:cs typeface="Calibri" pitchFamily="34" charset="-120"/>
               </a:rPr>
-              <a:t>CTR, taux de conversion, CPC et CPA par canal.</a:t>
+              <a:t>À partir des données clients et de leur historique de ventes.</a:t>
             </a:r>
             <a:endParaRPr lang="en-US" sz="1150" dirty="0"/>
           </a:p>
@@ -2758,13 +2220,13 @@
       </p:sp>
       <p:sp>
         <p:nvSpPr>
-          <p:cNvPr id="19" name="Shape 14"/>
-          <p:cNvSpPr/>
-          <p:nvPr/>
-        </p:nvSpPr>
-        <p:spPr>
-          <a:xfrm>
-            <a:off x="8997696" y="1874520"/>
+          <p:cNvPr id="9" name="Shape 6"/>
+          <p:cNvSpPr/>
+          <p:nvPr/>
+        </p:nvSpPr>
+        <p:spPr>
+          <a:xfrm>
+            <a:off x="3364992" y="1874520"/>
             <a:ext cx="2606040" cy="3566160"/>
           </a:xfrm>
           <a:prstGeom prst="roundRect">
@@ -2777,7 +2239,7 @@
           </a:solidFill>
           <a:ln/>
           <a:effectLst>
-            <a:outerShdw sx="100000" sy="100000" kx="0" ky="0" algn="bl" rotWithShape="0" blurRad="76200" dist="25400" dir="5400000">
+            <a:outerShdw blurRad="76200" dist="25400" dir="5400000" algn="bl" rotWithShape="0">
               <a:srgbClr val="8A94B8">
                 <a:alpha val="18000"/>
               </a:srgbClr>
@@ -2787,13 +2249,13 @@
       </p:sp>
       <p:sp>
         <p:nvSpPr>
-          <p:cNvPr id="20" name="Shape 15"/>
-          <p:cNvSpPr/>
-          <p:nvPr/>
-        </p:nvSpPr>
-        <p:spPr>
-          <a:xfrm>
-            <a:off x="9957816" y="2194560"/>
+          <p:cNvPr id="10" name="Shape 7"/>
+          <p:cNvSpPr/>
+          <p:nvPr/>
+        </p:nvSpPr>
+        <p:spPr>
+          <a:xfrm>
+            <a:off x="4325112" y="2194560"/>
             <a:ext cx="685800" cy="685800"/>
           </a:xfrm>
           <a:prstGeom prst="ellipse">
@@ -2807,7 +2269,7 @@
       </p:sp>
       <p:pic>
         <p:nvPicPr>
-          <p:cNvPr id="21" name="Image 3" descr="icon_compass.png">    </p:cNvPr>
+          <p:cNvPr id="11" name="Image 1" descr="icon_bag.png"/>
           <p:cNvPicPr>
             <a:picLocks noChangeAspect="1"/>
           </p:cNvPicPr>
@@ -2821,7 +2283,7 @@
         </p:blipFill>
         <p:spPr>
           <a:xfrm>
-            <a:off x="10136124" y="2372868"/>
+            <a:off x="4503420" y="2372868"/>
             <a:ext cx="329184" cy="329184"/>
           </a:xfrm>
           <a:prstGeom prst="rect">
@@ -2831,13 +2293,13 @@
       </p:pic>
       <p:sp>
         <p:nvSpPr>
-          <p:cNvPr id="22" name="Text 16"/>
-          <p:cNvSpPr/>
-          <p:nvPr/>
-        </p:nvSpPr>
-        <p:spPr>
-          <a:xfrm>
-            <a:off x="9162288" y="3108960"/>
+          <p:cNvPr id="12" name="Text 8"/>
+          <p:cNvSpPr/>
+          <p:nvPr/>
+        </p:nvSpPr>
+        <p:spPr>
+          <a:xfrm>
+            <a:off x="3529584" y="3108960"/>
             <a:ext cx="2276856" cy="685800"/>
           </a:xfrm>
           <a:prstGeom prst="rect">
@@ -2850,7 +2312,7 @@
           <a:bodyPr wrap="square" rtlCol="0" anchor="t"/>
           <a:lstStyle/>
           <a:p>
-            <a:pPr algn="ctr" indent="0" marL="0">
+            <a:pPr marL="0" indent="0" algn="ctr">
               <a:buNone/>
             </a:pPr>
             <a:r>
@@ -2862,7 +2324,7 @@
                 <a:ea typeface="Calibri" pitchFamily="34" charset="-122"/>
                 <a:cs typeface="Calibri" pitchFamily="34" charset="-120"/>
               </a:rPr>
-              <a:t>Proposer une stratégie digitale</a:t>
+              <a:t>Analyser le comportement d'achat</a:t>
             </a:r>
             <a:endParaRPr lang="en-US" sz="1400" dirty="0"/>
           </a:p>
@@ -2870,13 +2332,13 @@
       </p:sp>
       <p:sp>
         <p:nvSpPr>
-          <p:cNvPr id="23" name="Text 17"/>
-          <p:cNvSpPr/>
-          <p:nvPr/>
-        </p:nvSpPr>
-        <p:spPr>
-          <a:xfrm>
-            <a:off x="9198864" y="3840480"/>
+          <p:cNvPr id="13" name="Text 9"/>
+          <p:cNvSpPr/>
+          <p:nvPr/>
+        </p:nvSpPr>
+        <p:spPr>
+          <a:xfrm>
+            <a:off x="3566160" y="3840480"/>
             <a:ext cx="2203704" cy="1371600"/>
           </a:xfrm>
           <a:prstGeom prst="rect">
@@ -2889,7 +2351,7 @@
           <a:bodyPr wrap="square" rtlCol="0" anchor="t"/>
           <a:lstStyle/>
           <a:p>
-            <a:pPr algn="ctr" indent="0" marL="0">
+            <a:pPr marL="0" indent="0" algn="ctr">
               <a:buNone/>
             </a:pPr>
             <a:r>
@@ -2901,7 +2363,7 @@
                 <a:ea typeface="Calibri" pitchFamily="34" charset="-122"/>
                 <a:cs typeface="Calibri" pitchFamily="34" charset="-120"/>
               </a:rPr>
-              <a:t>Personnalisée par segment, assistée par l'IA générative.</a:t>
+              <a:t>Produits achetés, fréquence, canaux privilégiés.</a:t>
             </a:r>
             <a:endParaRPr lang="en-US" sz="1150" dirty="0"/>
           </a:p>
@@ -2909,37 +2371,339 @@
       </p:sp>
       <p:sp>
         <p:nvSpPr>
-          <p:cNvPr id="24" name="Text 18"/>
-          <p:cNvSpPr/>
-          <p:nvPr/>
-        </p:nvSpPr>
-        <p:spPr>
-          <a:xfrm>
-            <a:off x="457200" y="6528816"/>
-            <a:ext cx="7315200" cy="274320"/>
-          </a:xfrm>
-          <a:prstGeom prst="rect">
-            <a:avLst/>
-          </a:prstGeom>
-          <a:noFill/>
-          <a:ln/>
-        </p:spPr>
-        <p:txBody>
-          <a:bodyPr wrap="square" rtlCol="0" anchor="ctr"/>
-          <a:lstStyle/>
-          <a:p>
-            <a:pPr algn="l" indent="0" marL="0">
-              <a:buNone/>
-            </a:pPr>
-            <a:r>
-              <a:rPr lang="en-US" sz="900" dirty="0">
-                <a:solidFill>
-                  <a:srgbClr val="5B6270"/>
+          <p:cNvPr id="14" name="Shape 10"/>
+          <p:cNvSpPr/>
+          <p:nvPr/>
+        </p:nvSpPr>
+        <p:spPr>
+          <a:xfrm>
+            <a:off x="6181344" y="1874520"/>
+            <a:ext cx="2606040" cy="3566160"/>
+          </a:xfrm>
+          <a:prstGeom prst="roundRect">
+            <a:avLst>
+              <a:gd name="adj" fmla="val 2807"/>
+            </a:avLst>
+          </a:prstGeom>
+          <a:solidFill>
+            <a:srgbClr val="F5F7FB"/>
+          </a:solidFill>
+          <a:ln/>
+          <a:effectLst>
+            <a:outerShdw blurRad="76200" dist="25400" dir="5400000" algn="bl" rotWithShape="0">
+              <a:srgbClr val="8A94B8">
+                <a:alpha val="18000"/>
+              </a:srgbClr>
+            </a:outerShdw>
+          </a:effectLst>
+        </p:spPr>
+      </p:sp>
+      <p:sp>
+        <p:nvSpPr>
+          <p:cNvPr id="15" name="Shape 11"/>
+          <p:cNvSpPr/>
+          <p:nvPr/>
+        </p:nvSpPr>
+        <p:spPr>
+          <a:xfrm>
+            <a:off x="7141464" y="2194560"/>
+            <a:ext cx="685800" cy="685800"/>
+          </a:xfrm>
+          <a:prstGeom prst="ellipse">
+            <a:avLst/>
+          </a:prstGeom>
+          <a:solidFill>
+            <a:srgbClr val="1E2761"/>
+          </a:solidFill>
+          <a:ln/>
+        </p:spPr>
+      </p:sp>
+      <p:pic>
+        <p:nvPicPr>
+          <p:cNvPr id="16" name="Image 2" descr="icon_trending.png"/>
+          <p:cNvPicPr>
+            <a:picLocks noChangeAspect="1"/>
+          </p:cNvPicPr>
+          <p:nvPr/>
+        </p:nvPicPr>
+        <p:blipFill>
+          <a:blip r:embed="rId5"/>
+          <a:stretch>
+            <a:fillRect/>
+          </a:stretch>
+        </p:blipFill>
+        <p:spPr>
+          <a:xfrm>
+            <a:off x="7319772" y="2372868"/>
+            <a:ext cx="329184" cy="329184"/>
+          </a:xfrm>
+          <a:prstGeom prst="rect">
+            <a:avLst/>
+          </a:prstGeom>
+        </p:spPr>
+      </p:pic>
+      <p:sp>
+        <p:nvSpPr>
+          <p:cNvPr id="17" name="Text 12"/>
+          <p:cNvSpPr/>
+          <p:nvPr/>
+        </p:nvSpPr>
+        <p:spPr>
+          <a:xfrm>
+            <a:off x="6345936" y="3108960"/>
+            <a:ext cx="2276856" cy="685800"/>
+          </a:xfrm>
+          <a:prstGeom prst="rect">
+            <a:avLst/>
+          </a:prstGeom>
+          <a:noFill/>
+          <a:ln/>
+        </p:spPr>
+        <p:txBody>
+          <a:bodyPr wrap="square" rtlCol="0" anchor="t"/>
+          <a:lstStyle/>
+          <a:p>
+            <a:pPr marL="0" indent="0" algn="ctr">
+              <a:buNone/>
+            </a:pPr>
+            <a:r>
+              <a:rPr lang="en-US" sz="1400" b="1" dirty="0">
+                <a:solidFill>
+                  <a:srgbClr val="1E2761"/>
                 </a:solidFill>
                 <a:latin typeface="Calibri" pitchFamily="34" charset="0"/>
                 <a:ea typeface="Calibri" pitchFamily="34" charset="-122"/>
                 <a:cs typeface="Calibri" pitchFamily="34" charset="-120"/>
               </a:rPr>
+              <a:t>Évaluer les campagnes</a:t>
+            </a:r>
+            <a:endParaRPr lang="en-US" sz="1400" dirty="0"/>
+          </a:p>
+        </p:txBody>
+      </p:sp>
+      <p:sp>
+        <p:nvSpPr>
+          <p:cNvPr id="18" name="Text 13"/>
+          <p:cNvSpPr/>
+          <p:nvPr/>
+        </p:nvSpPr>
+        <p:spPr>
+          <a:xfrm>
+            <a:off x="6382512" y="3840480"/>
+            <a:ext cx="2203704" cy="1371600"/>
+          </a:xfrm>
+          <a:prstGeom prst="rect">
+            <a:avLst/>
+          </a:prstGeom>
+          <a:noFill/>
+          <a:ln/>
+        </p:spPr>
+        <p:txBody>
+          <a:bodyPr wrap="square" rtlCol="0" anchor="t"/>
+          <a:lstStyle/>
+          <a:p>
+            <a:pPr marL="0" indent="0" algn="ctr">
+              <a:buNone/>
+            </a:pPr>
+            <a:r>
+              <a:rPr lang="en-US" sz="1150" dirty="0">
+                <a:solidFill>
+                  <a:srgbClr val="5B6270"/>
+                </a:solidFill>
+                <a:latin typeface="Calibri" pitchFamily="34" charset="0"/>
+                <a:ea typeface="Calibri" pitchFamily="34" charset="-122"/>
+                <a:cs typeface="Calibri" pitchFamily="34" charset="-120"/>
+              </a:rPr>
+              <a:t>CTR, taux de conversion, CPC et CPA par canal.</a:t>
+            </a:r>
+            <a:endParaRPr lang="en-US" sz="1150" dirty="0"/>
+          </a:p>
+        </p:txBody>
+      </p:sp>
+      <p:sp>
+        <p:nvSpPr>
+          <p:cNvPr id="19" name="Shape 14"/>
+          <p:cNvSpPr/>
+          <p:nvPr/>
+        </p:nvSpPr>
+        <p:spPr>
+          <a:xfrm>
+            <a:off x="8997696" y="1874520"/>
+            <a:ext cx="2606040" cy="3566160"/>
+          </a:xfrm>
+          <a:prstGeom prst="roundRect">
+            <a:avLst>
+              <a:gd name="adj" fmla="val 2807"/>
+            </a:avLst>
+          </a:prstGeom>
+          <a:solidFill>
+            <a:srgbClr val="F5F7FB"/>
+          </a:solidFill>
+          <a:ln/>
+          <a:effectLst>
+            <a:outerShdw blurRad="76200" dist="25400" dir="5400000" algn="bl" rotWithShape="0">
+              <a:srgbClr val="8A94B8">
+                <a:alpha val="18000"/>
+              </a:srgbClr>
+            </a:outerShdw>
+          </a:effectLst>
+        </p:spPr>
+      </p:sp>
+      <p:sp>
+        <p:nvSpPr>
+          <p:cNvPr id="20" name="Shape 15"/>
+          <p:cNvSpPr/>
+          <p:nvPr/>
+        </p:nvSpPr>
+        <p:spPr>
+          <a:xfrm>
+            <a:off x="9957816" y="2194560"/>
+            <a:ext cx="685800" cy="685800"/>
+          </a:xfrm>
+          <a:prstGeom prst="ellipse">
+            <a:avLst/>
+          </a:prstGeom>
+          <a:solidFill>
+            <a:srgbClr val="1E2761"/>
+          </a:solidFill>
+          <a:ln/>
+        </p:spPr>
+      </p:sp>
+      <p:pic>
+        <p:nvPicPr>
+          <p:cNvPr id="21" name="Image 3" descr="icon_compass.png"/>
+          <p:cNvPicPr>
+            <a:picLocks noChangeAspect="1"/>
+          </p:cNvPicPr>
+          <p:nvPr/>
+        </p:nvPicPr>
+        <p:blipFill>
+          <a:blip r:embed="rId6"/>
+          <a:stretch>
+            <a:fillRect/>
+          </a:stretch>
+        </p:blipFill>
+        <p:spPr>
+          <a:xfrm>
+            <a:off x="10136124" y="2372868"/>
+            <a:ext cx="329184" cy="329184"/>
+          </a:xfrm>
+          <a:prstGeom prst="rect">
+            <a:avLst/>
+          </a:prstGeom>
+        </p:spPr>
+      </p:pic>
+      <p:sp>
+        <p:nvSpPr>
+          <p:cNvPr id="22" name="Text 16"/>
+          <p:cNvSpPr/>
+          <p:nvPr/>
+        </p:nvSpPr>
+        <p:spPr>
+          <a:xfrm>
+            <a:off x="9162288" y="3108960"/>
+            <a:ext cx="2276856" cy="685800"/>
+          </a:xfrm>
+          <a:prstGeom prst="rect">
+            <a:avLst/>
+          </a:prstGeom>
+          <a:noFill/>
+          <a:ln/>
+        </p:spPr>
+        <p:txBody>
+          <a:bodyPr wrap="square" rtlCol="0" anchor="t"/>
+          <a:lstStyle/>
+          <a:p>
+            <a:pPr marL="0" indent="0" algn="ctr">
+              <a:buNone/>
+            </a:pPr>
+            <a:r>
+              <a:rPr lang="en-US" sz="1400" b="1" dirty="0">
+                <a:solidFill>
+                  <a:srgbClr val="1E2761"/>
+                </a:solidFill>
+                <a:latin typeface="Calibri" pitchFamily="34" charset="0"/>
+                <a:ea typeface="Calibri" pitchFamily="34" charset="-122"/>
+                <a:cs typeface="Calibri" pitchFamily="34" charset="-120"/>
+              </a:rPr>
+              <a:t>Proposer une stratégie digitale</a:t>
+            </a:r>
+            <a:endParaRPr lang="en-US" sz="1400" dirty="0"/>
+          </a:p>
+        </p:txBody>
+      </p:sp>
+      <p:sp>
+        <p:nvSpPr>
+          <p:cNvPr id="23" name="Text 17"/>
+          <p:cNvSpPr/>
+          <p:nvPr/>
+        </p:nvSpPr>
+        <p:spPr>
+          <a:xfrm>
+            <a:off x="9198864" y="3840480"/>
+            <a:ext cx="2203704" cy="1371600"/>
+          </a:xfrm>
+          <a:prstGeom prst="rect">
+            <a:avLst/>
+          </a:prstGeom>
+          <a:noFill/>
+          <a:ln/>
+        </p:spPr>
+        <p:txBody>
+          <a:bodyPr wrap="square" rtlCol="0" anchor="t"/>
+          <a:lstStyle/>
+          <a:p>
+            <a:pPr marL="0" indent="0" algn="ctr">
+              <a:buNone/>
+            </a:pPr>
+            <a:r>
+              <a:rPr lang="en-US" sz="1150" dirty="0">
+                <a:solidFill>
+                  <a:srgbClr val="5B6270"/>
+                </a:solidFill>
+                <a:latin typeface="Calibri" pitchFamily="34" charset="0"/>
+                <a:ea typeface="Calibri" pitchFamily="34" charset="-122"/>
+                <a:cs typeface="Calibri" pitchFamily="34" charset="-120"/>
+              </a:rPr>
+              <a:t>Personnalisée par segment, assistée par l'IA générative.</a:t>
+            </a:r>
+            <a:endParaRPr lang="en-US" sz="1150" dirty="0"/>
+          </a:p>
+        </p:txBody>
+      </p:sp>
+      <p:sp>
+        <p:nvSpPr>
+          <p:cNvPr id="24" name="Text 18"/>
+          <p:cNvSpPr/>
+          <p:nvPr/>
+        </p:nvSpPr>
+        <p:spPr>
+          <a:xfrm>
+            <a:off x="457200" y="6528816"/>
+            <a:ext cx="7315200" cy="274320"/>
+          </a:xfrm>
+          <a:prstGeom prst="rect">
+            <a:avLst/>
+          </a:prstGeom>
+          <a:noFill/>
+          <a:ln/>
+        </p:spPr>
+        <p:txBody>
+          <a:bodyPr wrap="square" rtlCol="0" anchor="ctr"/>
+          <a:lstStyle/>
+          <a:p>
+            <a:pPr marL="0" indent="0" algn="l">
+              <a:buNone/>
+            </a:pPr>
+            <a:r>
+              <a:rPr lang="en-US" sz="900" dirty="0">
+                <a:solidFill>
+                  <a:srgbClr val="5B6270"/>
+                </a:solidFill>
+                <a:latin typeface="Calibri" pitchFamily="34" charset="0"/>
+                <a:ea typeface="Calibri" pitchFamily="34" charset="-122"/>
+                <a:cs typeface="Calibri" pitchFamily="34" charset="-120"/>
+              </a:rPr>
               <a:t>Analyse &amp; Optimisation Marketing  •  ENI Fianarantsoa</a:t>
             </a:r>
             <a:endParaRPr lang="en-US" sz="900" dirty="0"/>
@@ -2967,7 +2731,7 @@
           <a:bodyPr wrap="square" rtlCol="0" anchor="ctr"/>
           <a:lstStyle/>
           <a:p>
-            <a:pPr algn="r" indent="0" marL="0">
+            <a:pPr marL="0" indent="0" algn="r">
               <a:buNone/>
             </a:pPr>
             <a:r>
@@ -3001,6 +2765,7 @@
         <a:solidFill>
           <a:srgbClr val="FFFFFF"/>
         </a:solidFill>
+        <a:effectLst/>
       </p:bgPr>
     </p:bg>
     <p:spTree>
@@ -3038,7 +2803,7 @@
           <a:bodyPr wrap="square" rtlCol="0" anchor="ctr"/>
           <a:lstStyle/>
           <a:p>
-            <a:pPr indent="0" marL="0">
+            <a:pPr marL="0" indent="0">
               <a:buNone/>
             </a:pPr>
             <a:r>
@@ -3077,7 +2842,7 @@
           <a:bodyPr wrap="square" rtlCol="0" anchor="ctr"/>
           <a:lstStyle/>
           <a:p>
-            <a:pPr indent="0" marL="0">
+            <a:pPr marL="0" indent="0">
               <a:buNone/>
             </a:pPr>
             <a:r>
@@ -3139,295 +2904,7 @@
       </p:sp>
       <p:pic>
         <p:nvPicPr>
-          <p:cNvPr id="6" name="Image 0" descr="icon_users.png">    </p:cNvPr>
-          <p:cNvPicPr>
-            <a:picLocks noChangeAspect="1"/>
-          </p:cNvPicPr>
-          <p:nvPr/>
-        </p:nvPicPr>
-        <p:blipFill>
-          <a:blip r:embed="rId1"/>
-          <a:stretch>
-            <a:fillRect/>
-          </a:stretch>
-        </p:blipFill>
-        <p:spPr>
-          <a:xfrm>
-            <a:off x="967435" y="2247595"/>
-            <a:ext cx="351130" cy="351130"/>
-          </a:xfrm>
-          <a:prstGeom prst="rect">
-            <a:avLst/>
-          </a:prstGeom>
-        </p:spPr>
-      </p:pic>
-      <p:sp>
-        <p:nvSpPr>
-          <p:cNvPr id="7" name="Text 4"/>
-          <p:cNvSpPr/>
-          <p:nvPr/>
-        </p:nvSpPr>
-        <p:spPr>
-          <a:xfrm>
-            <a:off x="1600200" y="1801368"/>
-            <a:ext cx="1371600" cy="685800"/>
-          </a:xfrm>
-          <a:prstGeom prst="rect">
-            <a:avLst/>
-          </a:prstGeom>
-          <a:noFill/>
-          <a:ln/>
-        </p:spPr>
-        <p:txBody>
-          <a:bodyPr wrap="square" rtlCol="0" anchor="ctr"/>
-          <a:lstStyle/>
-          <a:p>
-            <a:pPr indent="0" marL="0">
-              <a:buNone/>
-            </a:pPr>
-            <a:r>
-              <a:rPr lang="en-US" sz="3400" b="1" dirty="0">
-                <a:solidFill>
-                  <a:srgbClr val="FFFFFF"/>
-                </a:solidFill>
-                <a:latin typeface="Cambria" pitchFamily="34" charset="0"/>
-                <a:ea typeface="Cambria" pitchFamily="34" charset="-122"/>
-                <a:cs typeface="Cambria" pitchFamily="34" charset="-120"/>
-              </a:rPr>
-              <a:t>5</a:t>
-            </a:r>
-            <a:endParaRPr lang="en-US" sz="3400" dirty="0"/>
-          </a:p>
-        </p:txBody>
-      </p:sp>
-      <p:sp>
-        <p:nvSpPr>
-          <p:cNvPr id="8" name="Text 5"/>
-          <p:cNvSpPr/>
-          <p:nvPr/>
-        </p:nvSpPr>
-        <p:spPr>
-          <a:xfrm>
-            <a:off x="1600200" y="2468880"/>
-            <a:ext cx="1371600" cy="365760"/>
-          </a:xfrm>
-          <a:prstGeom prst="rect">
-            <a:avLst/>
-          </a:prstGeom>
-          <a:noFill/>
-          <a:ln/>
-        </p:spPr>
-        <p:txBody>
-          <a:bodyPr wrap="square" rtlCol="0" anchor="t"/>
-          <a:lstStyle/>
-          <a:p>
-            <a:pPr indent="0" marL="0">
-              <a:buNone/>
-            </a:pPr>
-            <a:r>
-              <a:rPr lang="en-US" sz="1300" dirty="0">
-                <a:solidFill>
-                  <a:srgbClr val="CADCFC"/>
-                </a:solidFill>
-                <a:latin typeface="Calibri" pitchFamily="34" charset="0"/>
-                <a:ea typeface="Calibri" pitchFamily="34" charset="-122"/>
-                <a:cs typeface="Calibri" pitchFamily="34" charset="-120"/>
-              </a:rPr>
-              <a:t>Clients</a:t>
-            </a:r>
-            <a:endParaRPr lang="en-US" sz="1300" dirty="0"/>
-          </a:p>
-        </p:txBody>
-      </p:sp>
-      <p:sp>
-        <p:nvSpPr>
-          <p:cNvPr id="9" name="Shape 6"/>
-          <p:cNvSpPr/>
-          <p:nvPr/>
-        </p:nvSpPr>
-        <p:spPr>
-          <a:xfrm>
-            <a:off x="3364992" y="1600200"/>
-            <a:ext cx="2606040" cy="1645920"/>
-          </a:xfrm>
-          <a:prstGeom prst="roundRect">
-            <a:avLst>
-              <a:gd name="adj" fmla="val 4444"/>
-            </a:avLst>
-          </a:prstGeom>
-          <a:solidFill>
-            <a:srgbClr val="1E2761"/>
-          </a:solidFill>
-          <a:ln/>
-        </p:spPr>
-      </p:sp>
-      <p:sp>
-        <p:nvSpPr>
-          <p:cNvPr id="10" name="Shape 7"/>
-          <p:cNvSpPr/>
-          <p:nvPr/>
-        </p:nvSpPr>
-        <p:spPr>
-          <a:xfrm>
-            <a:off x="3593592" y="2057400"/>
-            <a:ext cx="731520" cy="731520"/>
-          </a:xfrm>
-          <a:prstGeom prst="ellipse">
-            <a:avLst/>
-          </a:prstGeom>
-          <a:solidFill>
-            <a:srgbClr val="F4623A"/>
-          </a:solidFill>
-          <a:ln/>
-        </p:spPr>
-      </p:sp>
-      <p:pic>
-        <p:nvPicPr>
-          <p:cNvPr id="11" name="Image 1" descr="icon_bag.png">    </p:cNvPr>
-          <p:cNvPicPr>
-            <a:picLocks noChangeAspect="1"/>
-          </p:cNvPicPr>
-          <p:nvPr/>
-        </p:nvPicPr>
-        <p:blipFill>
-          <a:blip r:embed="rId2"/>
-          <a:stretch>
-            <a:fillRect/>
-          </a:stretch>
-        </p:blipFill>
-        <p:spPr>
-          <a:xfrm>
-            <a:off x="3783787" y="2247595"/>
-            <a:ext cx="351130" cy="351130"/>
-          </a:xfrm>
-          <a:prstGeom prst="rect">
-            <a:avLst/>
-          </a:prstGeom>
-        </p:spPr>
-      </p:pic>
-      <p:sp>
-        <p:nvSpPr>
-          <p:cNvPr id="12" name="Text 8"/>
-          <p:cNvSpPr/>
-          <p:nvPr/>
-        </p:nvSpPr>
-        <p:spPr>
-          <a:xfrm>
-            <a:off x="4416552" y="1801368"/>
-            <a:ext cx="1371600" cy="685800"/>
-          </a:xfrm>
-          <a:prstGeom prst="rect">
-            <a:avLst/>
-          </a:prstGeom>
-          <a:noFill/>
-          <a:ln/>
-        </p:spPr>
-        <p:txBody>
-          <a:bodyPr wrap="square" rtlCol="0" anchor="ctr"/>
-          <a:lstStyle/>
-          <a:p>
-            <a:pPr indent="0" marL="0">
-              <a:buNone/>
-            </a:pPr>
-            <a:r>
-              <a:rPr lang="en-US" sz="3400" b="1" dirty="0">
-                <a:solidFill>
-                  <a:srgbClr val="FFFFFF"/>
-                </a:solidFill>
-                <a:latin typeface="Cambria" pitchFamily="34" charset="0"/>
-                <a:ea typeface="Cambria" pitchFamily="34" charset="-122"/>
-                <a:cs typeface="Cambria" pitchFamily="34" charset="-120"/>
-              </a:rPr>
-              <a:t>5</a:t>
-            </a:r>
-            <a:endParaRPr lang="en-US" sz="3400" dirty="0"/>
-          </a:p>
-        </p:txBody>
-      </p:sp>
-      <p:sp>
-        <p:nvSpPr>
-          <p:cNvPr id="13" name="Text 9"/>
-          <p:cNvSpPr/>
-          <p:nvPr/>
-        </p:nvSpPr>
-        <p:spPr>
-          <a:xfrm>
-            <a:off x="4416552" y="2468880"/>
-            <a:ext cx="1371600" cy="365760"/>
-          </a:xfrm>
-          <a:prstGeom prst="rect">
-            <a:avLst/>
-          </a:prstGeom>
-          <a:noFill/>
-          <a:ln/>
-        </p:spPr>
-        <p:txBody>
-          <a:bodyPr wrap="square" rtlCol="0" anchor="t"/>
-          <a:lstStyle/>
-          <a:p>
-            <a:pPr indent="0" marL="0">
-              <a:buNone/>
-            </a:pPr>
-            <a:r>
-              <a:rPr lang="en-US" sz="1300" dirty="0">
-                <a:solidFill>
-                  <a:srgbClr val="CADCFC"/>
-                </a:solidFill>
-                <a:latin typeface="Calibri" pitchFamily="34" charset="0"/>
-                <a:ea typeface="Calibri" pitchFamily="34" charset="-122"/>
-                <a:cs typeface="Calibri" pitchFamily="34" charset="-120"/>
-              </a:rPr>
-              <a:t>Ventes</a:t>
-            </a:r>
-            <a:endParaRPr lang="en-US" sz="1300" dirty="0"/>
-          </a:p>
-        </p:txBody>
-      </p:sp>
-      <p:sp>
-        <p:nvSpPr>
-          <p:cNvPr id="14" name="Shape 10"/>
-          <p:cNvSpPr/>
-          <p:nvPr/>
-        </p:nvSpPr>
-        <p:spPr>
-          <a:xfrm>
-            <a:off x="6181344" y="1600200"/>
-            <a:ext cx="2606040" cy="1645920"/>
-          </a:xfrm>
-          <a:prstGeom prst="roundRect">
-            <a:avLst>
-              <a:gd name="adj" fmla="val 4444"/>
-            </a:avLst>
-          </a:prstGeom>
-          <a:solidFill>
-            <a:srgbClr val="1E2761"/>
-          </a:solidFill>
-          <a:ln/>
-        </p:spPr>
-      </p:sp>
-      <p:sp>
-        <p:nvSpPr>
-          <p:cNvPr id="15" name="Shape 11"/>
-          <p:cNvSpPr/>
-          <p:nvPr/>
-        </p:nvSpPr>
-        <p:spPr>
-          <a:xfrm>
-            <a:off x="6409944" y="2057400"/>
-            <a:ext cx="731520" cy="731520"/>
-          </a:xfrm>
-          <a:prstGeom prst="ellipse">
-            <a:avLst/>
-          </a:prstGeom>
-          <a:solidFill>
-            <a:srgbClr val="F4623A"/>
-          </a:solidFill>
-          <a:ln/>
-        </p:spPr>
-      </p:sp>
-      <p:pic>
-        <p:nvPicPr>
-          <p:cNvPr id="16" name="Image 2" descr="icon_layers.png">    </p:cNvPr>
+          <p:cNvPr id="6" name="Image 0" descr="icon_users.png"/>
           <p:cNvPicPr>
             <a:picLocks noChangeAspect="1"/>
           </p:cNvPicPr>
@@ -3441,7 +2918,7 @@
         </p:blipFill>
         <p:spPr>
           <a:xfrm>
-            <a:off x="6600139" y="2247595"/>
+            <a:off x="967435" y="2247595"/>
             <a:ext cx="351130" cy="351130"/>
           </a:xfrm>
           <a:prstGeom prst="rect">
@@ -3451,13 +2928,13 @@
       </p:pic>
       <p:sp>
         <p:nvSpPr>
-          <p:cNvPr id="17" name="Text 12"/>
-          <p:cNvSpPr/>
-          <p:nvPr/>
-        </p:nvSpPr>
-        <p:spPr>
-          <a:xfrm>
-            <a:off x="7232904" y="1801368"/>
+          <p:cNvPr id="7" name="Text 4"/>
+          <p:cNvSpPr/>
+          <p:nvPr/>
+        </p:nvSpPr>
+        <p:spPr>
+          <a:xfrm>
+            <a:off x="1600200" y="1801368"/>
             <a:ext cx="1371600" cy="685800"/>
           </a:xfrm>
           <a:prstGeom prst="rect">
@@ -3470,7 +2947,7 @@
           <a:bodyPr wrap="square" rtlCol="0" anchor="ctr"/>
           <a:lstStyle/>
           <a:p>
-            <a:pPr indent="0" marL="0">
+            <a:pPr marL="0" indent="0">
               <a:buNone/>
             </a:pPr>
             <a:r>
@@ -3490,13 +2967,13 @@
       </p:sp>
       <p:sp>
         <p:nvSpPr>
-          <p:cNvPr id="18" name="Text 13"/>
-          <p:cNvSpPr/>
-          <p:nvPr/>
-        </p:nvSpPr>
-        <p:spPr>
-          <a:xfrm>
-            <a:off x="7232904" y="2468880"/>
+          <p:cNvPr id="8" name="Text 5"/>
+          <p:cNvSpPr/>
+          <p:nvPr/>
+        </p:nvSpPr>
+        <p:spPr>
+          <a:xfrm>
+            <a:off x="1600200" y="2468880"/>
             <a:ext cx="1371600" cy="365760"/>
           </a:xfrm>
           <a:prstGeom prst="rect">
@@ -3509,7 +2986,7 @@
           <a:bodyPr wrap="square" rtlCol="0" anchor="t"/>
           <a:lstStyle/>
           <a:p>
-            <a:pPr indent="0" marL="0">
+            <a:pPr marL="0" indent="0">
               <a:buNone/>
             </a:pPr>
             <a:r>
@@ -3521,7 +2998,7 @@
                 <a:ea typeface="Calibri" pitchFamily="34" charset="-122"/>
                 <a:cs typeface="Calibri" pitchFamily="34" charset="-120"/>
               </a:rPr>
-              <a:t>Produits</a:t>
+              <a:t>Clients</a:t>
             </a:r>
             <a:endParaRPr lang="en-US" sz="1300" dirty="0"/>
           </a:p>
@@ -3529,13 +3006,13 @@
       </p:sp>
       <p:sp>
         <p:nvSpPr>
-          <p:cNvPr id="19" name="Shape 14"/>
-          <p:cNvSpPr/>
-          <p:nvPr/>
-        </p:nvSpPr>
-        <p:spPr>
-          <a:xfrm>
-            <a:off x="8997696" y="1600200"/>
+          <p:cNvPr id="9" name="Shape 6"/>
+          <p:cNvSpPr/>
+          <p:nvPr/>
+        </p:nvSpPr>
+        <p:spPr>
+          <a:xfrm>
+            <a:off x="3364992" y="1600200"/>
             <a:ext cx="2606040" cy="1645920"/>
           </a:xfrm>
           <a:prstGeom prst="roundRect">
@@ -3551,13 +3028,13 @@
       </p:sp>
       <p:sp>
         <p:nvSpPr>
-          <p:cNvPr id="20" name="Shape 15"/>
-          <p:cNvSpPr/>
-          <p:nvPr/>
-        </p:nvSpPr>
-        <p:spPr>
-          <a:xfrm>
-            <a:off x="9226296" y="2057400"/>
+          <p:cNvPr id="10" name="Shape 7"/>
+          <p:cNvSpPr/>
+          <p:nvPr/>
+        </p:nvSpPr>
+        <p:spPr>
+          <a:xfrm>
+            <a:off x="3593592" y="2057400"/>
             <a:ext cx="731520" cy="731520"/>
           </a:xfrm>
           <a:prstGeom prst="ellipse">
@@ -3571,7 +3048,7 @@
       </p:sp>
       <p:pic>
         <p:nvPicPr>
-          <p:cNvPr id="21" name="Image 3" descr="icon_trending.png">    </p:cNvPr>
+          <p:cNvPr id="11" name="Image 1" descr="icon_bag.png"/>
           <p:cNvPicPr>
             <a:picLocks noChangeAspect="1"/>
           </p:cNvPicPr>
@@ -3585,7 +3062,7 @@
         </p:blipFill>
         <p:spPr>
           <a:xfrm>
-            <a:off x="9416491" y="2247595"/>
+            <a:off x="3783787" y="2247595"/>
             <a:ext cx="351130" cy="351130"/>
           </a:xfrm>
           <a:prstGeom prst="rect">
@@ -3595,13 +3072,13 @@
       </p:pic>
       <p:sp>
         <p:nvSpPr>
-          <p:cNvPr id="22" name="Text 16"/>
-          <p:cNvSpPr/>
-          <p:nvPr/>
-        </p:nvSpPr>
-        <p:spPr>
-          <a:xfrm>
-            <a:off x="10049256" y="1801368"/>
+          <p:cNvPr id="12" name="Text 8"/>
+          <p:cNvSpPr/>
+          <p:nvPr/>
+        </p:nvSpPr>
+        <p:spPr>
+          <a:xfrm>
+            <a:off x="4416552" y="1801368"/>
             <a:ext cx="1371600" cy="685800"/>
           </a:xfrm>
           <a:prstGeom prst="rect">
@@ -3614,7 +3091,7 @@
           <a:bodyPr wrap="square" rtlCol="0" anchor="ctr"/>
           <a:lstStyle/>
           <a:p>
-            <a:pPr indent="0" marL="0">
+            <a:pPr marL="0" indent="0">
               <a:buNone/>
             </a:pPr>
             <a:r>
@@ -3634,13 +3111,13 @@
       </p:sp>
       <p:sp>
         <p:nvSpPr>
-          <p:cNvPr id="23" name="Text 17"/>
-          <p:cNvSpPr/>
-          <p:nvPr/>
-        </p:nvSpPr>
-        <p:spPr>
-          <a:xfrm>
-            <a:off x="10049256" y="2468880"/>
+          <p:cNvPr id="13" name="Text 9"/>
+          <p:cNvSpPr/>
+          <p:nvPr/>
+        </p:nvSpPr>
+        <p:spPr>
+          <a:xfrm>
+            <a:off x="4416552" y="2468880"/>
             <a:ext cx="1371600" cy="365760"/>
           </a:xfrm>
           <a:prstGeom prst="rect">
@@ -3653,7 +3130,7 @@
           <a:bodyPr wrap="square" rtlCol="0" anchor="t"/>
           <a:lstStyle/>
           <a:p>
-            <a:pPr indent="0" marL="0">
+            <a:pPr marL="0" indent="0">
               <a:buNone/>
             </a:pPr>
             <a:r>
@@ -3665,7 +3142,7 @@
                 <a:ea typeface="Calibri" pitchFamily="34" charset="-122"/>
                 <a:cs typeface="Calibri" pitchFamily="34" charset="-120"/>
               </a:rPr>
-              <a:t>Campagnes</a:t>
+              <a:t>Ventes</a:t>
             </a:r>
             <a:endParaRPr lang="en-US" sz="1300" dirty="0"/>
           </a:p>
@@ -3673,14 +3150,80 @@
       </p:sp>
       <p:sp>
         <p:nvSpPr>
-          <p:cNvPr id="24" name="Text 18"/>
-          <p:cNvSpPr/>
-          <p:nvPr/>
-        </p:nvSpPr>
-        <p:spPr>
-          <a:xfrm>
-            <a:off x="548640" y="3520440"/>
-            <a:ext cx="5120640" cy="320040"/>
+          <p:cNvPr id="14" name="Shape 10"/>
+          <p:cNvSpPr/>
+          <p:nvPr/>
+        </p:nvSpPr>
+        <p:spPr>
+          <a:xfrm>
+            <a:off x="6181344" y="1600200"/>
+            <a:ext cx="2606040" cy="1645920"/>
+          </a:xfrm>
+          <a:prstGeom prst="roundRect">
+            <a:avLst>
+              <a:gd name="adj" fmla="val 4444"/>
+            </a:avLst>
+          </a:prstGeom>
+          <a:solidFill>
+            <a:srgbClr val="1E2761"/>
+          </a:solidFill>
+          <a:ln/>
+        </p:spPr>
+      </p:sp>
+      <p:sp>
+        <p:nvSpPr>
+          <p:cNvPr id="15" name="Shape 11"/>
+          <p:cNvSpPr/>
+          <p:nvPr/>
+        </p:nvSpPr>
+        <p:spPr>
+          <a:xfrm>
+            <a:off x="6409944" y="2057400"/>
+            <a:ext cx="731520" cy="731520"/>
+          </a:xfrm>
+          <a:prstGeom prst="ellipse">
+            <a:avLst/>
+          </a:prstGeom>
+          <a:solidFill>
+            <a:srgbClr val="F4623A"/>
+          </a:solidFill>
+          <a:ln/>
+        </p:spPr>
+      </p:sp>
+      <p:pic>
+        <p:nvPicPr>
+          <p:cNvPr id="16" name="Image 2" descr="icon_layers.png"/>
+          <p:cNvPicPr>
+            <a:picLocks noChangeAspect="1"/>
+          </p:cNvPicPr>
+          <p:nvPr/>
+        </p:nvPicPr>
+        <p:blipFill>
+          <a:blip r:embed="rId5"/>
+          <a:stretch>
+            <a:fillRect/>
+          </a:stretch>
+        </p:blipFill>
+        <p:spPr>
+          <a:xfrm>
+            <a:off x="6600139" y="2247595"/>
+            <a:ext cx="351130" cy="351130"/>
+          </a:xfrm>
+          <a:prstGeom prst="rect">
+            <a:avLst/>
+          </a:prstGeom>
+        </p:spPr>
+      </p:pic>
+      <p:sp>
+        <p:nvSpPr>
+          <p:cNvPr id="17" name="Text 12"/>
+          <p:cNvSpPr/>
+          <p:nvPr/>
+        </p:nvSpPr>
+        <p:spPr>
+          <a:xfrm>
+            <a:off x="7232904" y="1801368"/>
+            <a:ext cx="1371600" cy="685800"/>
           </a:xfrm>
           <a:prstGeom prst="rect">
             <a:avLst/>
@@ -3692,19 +3235,58 @@
           <a:bodyPr wrap="square" rtlCol="0" anchor="ctr"/>
           <a:lstStyle/>
           <a:p>
-            <a:pPr indent="0" marL="0">
-              <a:buNone/>
-            </a:pPr>
-            <a:r>
-              <a:rPr lang="en-US" sz="1300" b="1" dirty="0">
-                <a:solidFill>
-                  <a:srgbClr val="1E2761"/>
+            <a:pPr marL="0" indent="0">
+              <a:buNone/>
+            </a:pPr>
+            <a:r>
+              <a:rPr lang="en-US" sz="3400" b="1" dirty="0">
+                <a:solidFill>
+                  <a:srgbClr val="FFFFFF"/>
+                </a:solidFill>
+                <a:latin typeface="Cambria" pitchFamily="34" charset="0"/>
+                <a:ea typeface="Cambria" pitchFamily="34" charset="-122"/>
+                <a:cs typeface="Cambria" pitchFamily="34" charset="-120"/>
+              </a:rPr>
+              <a:t>5</a:t>
+            </a:r>
+            <a:endParaRPr lang="en-US" sz="3400" dirty="0"/>
+          </a:p>
+        </p:txBody>
+      </p:sp>
+      <p:sp>
+        <p:nvSpPr>
+          <p:cNvPr id="18" name="Text 13"/>
+          <p:cNvSpPr/>
+          <p:nvPr/>
+        </p:nvSpPr>
+        <p:spPr>
+          <a:xfrm>
+            <a:off x="7232904" y="2468880"/>
+            <a:ext cx="1371600" cy="365760"/>
+          </a:xfrm>
+          <a:prstGeom prst="rect">
+            <a:avLst/>
+          </a:prstGeom>
+          <a:noFill/>
+          <a:ln/>
+        </p:spPr>
+        <p:txBody>
+          <a:bodyPr wrap="square" rtlCol="0" anchor="t"/>
+          <a:lstStyle/>
+          <a:p>
+            <a:pPr marL="0" indent="0">
+              <a:buNone/>
+            </a:pPr>
+            <a:r>
+              <a:rPr lang="en-US" sz="1300" dirty="0">
+                <a:solidFill>
+                  <a:srgbClr val="CADCFC"/>
                 </a:solidFill>
                 <a:latin typeface="Calibri" pitchFamily="34" charset="0"/>
                 <a:ea typeface="Calibri" pitchFamily="34" charset="-122"/>
                 <a:cs typeface="Calibri" pitchFamily="34" charset="-120"/>
               </a:rPr>
-              <a:t>Chiffre d'affaires calculé</a:t>
+              <a:t>Produits</a:t>
             </a:r>
             <a:endParaRPr lang="en-US" sz="1300" dirty="0"/>
           </a:p>
@@ -3712,14 +3294,80 @@
       </p:sp>
       <p:sp>
         <p:nvSpPr>
-          <p:cNvPr id="25" name="Text 19"/>
-          <p:cNvSpPr/>
-          <p:nvPr/>
-        </p:nvSpPr>
-        <p:spPr>
-          <a:xfrm>
-            <a:off x="548640" y="3840480"/>
-            <a:ext cx="5120640" cy="548640"/>
+          <p:cNvPr id="19" name="Shape 14"/>
+          <p:cNvSpPr/>
+          <p:nvPr/>
+        </p:nvSpPr>
+        <p:spPr>
+          <a:xfrm>
+            <a:off x="8997696" y="1600200"/>
+            <a:ext cx="2606040" cy="1645920"/>
+          </a:xfrm>
+          <a:prstGeom prst="roundRect">
+            <a:avLst>
+              <a:gd name="adj" fmla="val 4444"/>
+            </a:avLst>
+          </a:prstGeom>
+          <a:solidFill>
+            <a:srgbClr val="1E2761"/>
+          </a:solidFill>
+          <a:ln/>
+        </p:spPr>
+      </p:sp>
+      <p:sp>
+        <p:nvSpPr>
+          <p:cNvPr id="20" name="Shape 15"/>
+          <p:cNvSpPr/>
+          <p:nvPr/>
+        </p:nvSpPr>
+        <p:spPr>
+          <a:xfrm>
+            <a:off x="9226296" y="2057400"/>
+            <a:ext cx="731520" cy="731520"/>
+          </a:xfrm>
+          <a:prstGeom prst="ellipse">
+            <a:avLst/>
+          </a:prstGeom>
+          <a:solidFill>
+            <a:srgbClr val="F4623A"/>
+          </a:solidFill>
+          <a:ln/>
+        </p:spPr>
+      </p:sp>
+      <p:pic>
+        <p:nvPicPr>
+          <p:cNvPr id="21" name="Image 3" descr="icon_trending.png"/>
+          <p:cNvPicPr>
+            <a:picLocks noChangeAspect="1"/>
+          </p:cNvPicPr>
+          <p:nvPr/>
+        </p:nvPicPr>
+        <p:blipFill>
+          <a:blip r:embed="rId6"/>
+          <a:stretch>
+            <a:fillRect/>
+          </a:stretch>
+        </p:blipFill>
+        <p:spPr>
+          <a:xfrm>
+            <a:off x="9416491" y="2247595"/>
+            <a:ext cx="351130" cy="351130"/>
+          </a:xfrm>
+          <a:prstGeom prst="rect">
+            <a:avLst/>
+          </a:prstGeom>
+        </p:spPr>
+      </p:pic>
+      <p:sp>
+        <p:nvSpPr>
+          <p:cNvPr id="22" name="Text 16"/>
+          <p:cNvSpPr/>
+          <p:nvPr/>
+        </p:nvSpPr>
+        <p:spPr>
+          <a:xfrm>
+            <a:off x="10049256" y="1801368"/>
+            <a:ext cx="1371600" cy="685800"/>
           </a:xfrm>
           <a:prstGeom prst="rect">
             <a:avLst/>
@@ -3731,18 +3379,135 @@
           <a:bodyPr wrap="square" rtlCol="0" anchor="ctr"/>
           <a:lstStyle/>
           <a:p>
-            <a:pPr indent="0" marL="0">
-              <a:buNone/>
-            </a:pPr>
-            <a:r>
-              <a:rPr lang="en-US" sz="3000" b="1" dirty="0">
-                <a:solidFill>
-                  <a:srgbClr val="F4623A"/>
+            <a:pPr marL="0" indent="0">
+              <a:buNone/>
+            </a:pPr>
+            <a:r>
+              <a:rPr lang="en-US" sz="3400" b="1" dirty="0">
+                <a:solidFill>
+                  <a:srgbClr val="FFFFFF"/>
                 </a:solidFill>
                 <a:latin typeface="Cambria" pitchFamily="34" charset="0"/>
                 <a:ea typeface="Cambria" pitchFamily="34" charset="-122"/>
                 <a:cs typeface="Cambria" pitchFamily="34" charset="-120"/>
               </a:rPr>
+              <a:t>5</a:t>
+            </a:r>
+            <a:endParaRPr lang="en-US" sz="3400" dirty="0"/>
+          </a:p>
+        </p:txBody>
+      </p:sp>
+      <p:sp>
+        <p:nvSpPr>
+          <p:cNvPr id="23" name="Text 17"/>
+          <p:cNvSpPr/>
+          <p:nvPr/>
+        </p:nvSpPr>
+        <p:spPr>
+          <a:xfrm>
+            <a:off x="10049256" y="2468880"/>
+            <a:ext cx="1371600" cy="365760"/>
+          </a:xfrm>
+          <a:prstGeom prst="rect">
+            <a:avLst/>
+          </a:prstGeom>
+          <a:noFill/>
+          <a:ln/>
+        </p:spPr>
+        <p:txBody>
+          <a:bodyPr wrap="square" rtlCol="0" anchor="t"/>
+          <a:lstStyle/>
+          <a:p>
+            <a:pPr marL="0" indent="0">
+              <a:buNone/>
+            </a:pPr>
+            <a:r>
+              <a:rPr lang="en-US" sz="1300" dirty="0">
+                <a:solidFill>
+                  <a:srgbClr val="CADCFC"/>
+                </a:solidFill>
+                <a:latin typeface="Calibri" pitchFamily="34" charset="0"/>
+                <a:ea typeface="Calibri" pitchFamily="34" charset="-122"/>
+                <a:cs typeface="Calibri" pitchFamily="34" charset="-120"/>
+              </a:rPr>
+              <a:t>Campagnes</a:t>
+            </a:r>
+            <a:endParaRPr lang="en-US" sz="1300" dirty="0"/>
+          </a:p>
+        </p:txBody>
+      </p:sp>
+      <p:sp>
+        <p:nvSpPr>
+          <p:cNvPr id="24" name="Text 18"/>
+          <p:cNvSpPr/>
+          <p:nvPr/>
+        </p:nvSpPr>
+        <p:spPr>
+          <a:xfrm>
+            <a:off x="548640" y="3520440"/>
+            <a:ext cx="5120640" cy="320040"/>
+          </a:xfrm>
+          <a:prstGeom prst="rect">
+            <a:avLst/>
+          </a:prstGeom>
+          <a:noFill/>
+          <a:ln/>
+        </p:spPr>
+        <p:txBody>
+          <a:bodyPr wrap="square" rtlCol="0" anchor="ctr"/>
+          <a:lstStyle/>
+          <a:p>
+            <a:pPr marL="0" indent="0">
+              <a:buNone/>
+            </a:pPr>
+            <a:r>
+              <a:rPr lang="en-US" sz="1300" b="1" dirty="0">
+                <a:solidFill>
+                  <a:srgbClr val="1E2761"/>
+                </a:solidFill>
+                <a:latin typeface="Calibri" pitchFamily="34" charset="0"/>
+                <a:ea typeface="Calibri" pitchFamily="34" charset="-122"/>
+                <a:cs typeface="Calibri" pitchFamily="34" charset="-120"/>
+              </a:rPr>
+              <a:t>Chiffre d'affaires calculé</a:t>
+            </a:r>
+            <a:endParaRPr lang="en-US" sz="1300" dirty="0"/>
+          </a:p>
+        </p:txBody>
+      </p:sp>
+      <p:sp>
+        <p:nvSpPr>
+          <p:cNvPr id="25" name="Text 19"/>
+          <p:cNvSpPr/>
+          <p:nvPr/>
+        </p:nvSpPr>
+        <p:spPr>
+          <a:xfrm>
+            <a:off x="548640" y="3840480"/>
+            <a:ext cx="5120640" cy="548640"/>
+          </a:xfrm>
+          <a:prstGeom prst="rect">
+            <a:avLst/>
+          </a:prstGeom>
+          <a:noFill/>
+          <a:ln/>
+        </p:spPr>
+        <p:txBody>
+          <a:bodyPr wrap="square" rtlCol="0" anchor="ctr"/>
+          <a:lstStyle/>
+          <a:p>
+            <a:pPr marL="0" indent="0">
+              <a:buNone/>
+            </a:pPr>
+            <a:r>
+              <a:rPr lang="en-US" sz="3000" b="1" dirty="0">
+                <a:solidFill>
+                  <a:srgbClr val="F4623A"/>
+                </a:solidFill>
+                <a:latin typeface="Cambria" pitchFamily="34" charset="0"/>
+                <a:ea typeface="Cambria" pitchFamily="34" charset="-122"/>
+                <a:cs typeface="Cambria" pitchFamily="34" charset="-120"/>
+              </a:rPr>
               <a:t>475,00</a:t>
             </a:r>
             <a:endParaRPr lang="en-US" sz="3000" dirty="0"/>
@@ -3770,7 +3535,7 @@
           <a:bodyPr wrap="square" rtlCol="0" anchor="ctr"/>
           <a:lstStyle/>
           <a:p>
-            <a:pPr indent="0" marL="0">
+            <a:pPr marL="0" indent="0">
               <a:buNone/>
             </a:pPr>
             <a:r>
@@ -3832,7 +3597,7 @@
           <a:bodyPr wrap="square" rtlCol="0" anchor="ctr"/>
           <a:lstStyle/>
           <a:p>
-            <a:pPr indent="0" marL="0">
+            <a:pPr marL="0" indent="0">
               <a:buNone/>
             </a:pPr>
             <a:r>
@@ -3871,7 +3636,7 @@
           <a:bodyPr wrap="square" rtlCol="0" anchor="ctr"/>
           <a:lstStyle/>
           <a:p>
-            <a:pPr indent="0" marL="0">
+            <a:pPr marL="0" indent="0">
               <a:buNone/>
             </a:pPr>
             <a:r>
@@ -3910,7 +3675,7 @@
           <a:bodyPr wrap="square" rtlCol="0" anchor="ctr"/>
           <a:lstStyle/>
           <a:p>
-            <a:pPr indent="0" marL="0">
+            <a:pPr marL="0" indent="0">
               <a:buNone/>
             </a:pPr>
             <a:r>
@@ -3971,7 +3736,7 @@
           <a:bodyPr wrap="square" rtlCol="0" anchor="ctr"/>
           <a:lstStyle/>
           <a:p>
-            <a:pPr indent="0" marL="0">
+            <a:pPr marL="0" indent="0">
               <a:buNone/>
             </a:pPr>
             <a:r>
@@ -4010,7 +3775,7 @@
           <a:bodyPr wrap="square" rtlCol="0" anchor="ctr"/>
           <a:lstStyle/>
           <a:p>
-            <a:pPr algn="l" indent="0" marL="0">
+            <a:pPr marL="0" indent="0" algn="l">
               <a:buNone/>
             </a:pPr>
             <a:r>
@@ -4049,7 +3814,7 @@
           <a:bodyPr wrap="square" rtlCol="0" anchor="ctr"/>
           <a:lstStyle/>
           <a:p>
-            <a:pPr algn="r" indent="0" marL="0">
+            <a:pPr marL="0" indent="0" algn="r">
               <a:buNone/>
             </a:pPr>
             <a:r>
@@ -4083,6 +3848,7 @@
         <a:solidFill>
           <a:srgbClr val="FFFFFF"/>
         </a:solidFill>
+        <a:effectLst/>
       </p:bgPr>
     </p:bg>
     <p:spTree>
@@ -4120,7 +3886,7 @@
           <a:bodyPr wrap="square" rtlCol="0" anchor="ctr"/>
           <a:lstStyle/>
           <a:p>
-            <a:pPr indent="0" marL="0">
+            <a:pPr marL="0" indent="0">
               <a:buNone/>
             </a:pPr>
             <a:r>
@@ -4159,7 +3925,7 @@
           <a:bodyPr wrap="square" rtlCol="0" anchor="ctr"/>
           <a:lstStyle/>
           <a:p>
-            <a:pPr indent="0" marL="0">
+            <a:pPr marL="0" indent="0">
               <a:buNone/>
             </a:pPr>
             <a:r>
@@ -4220,7 +3986,7 @@
           <a:bodyPr wrap="square" rtlCol="0" anchor="ctr"/>
           <a:lstStyle/>
           <a:p>
-            <a:pPr indent="0" marL="0">
+            <a:pPr marL="0" indent="0">
               <a:buNone/>
             </a:pPr>
             <a:r>
@@ -4259,11 +4025,11 @@
           <a:bodyPr wrap="square" rtlCol="0" anchor="ctr"/>
           <a:lstStyle/>
           <a:p>
-            <a:pPr indent="0" marL="0">
-              <a:buNone/>
-            </a:pPr>
-            <a:r>
-              <a:rPr lang="en-US" sz="1100" b="1" spc="100" kern="0" dirty="0">
+            <a:pPr marL="0" indent="0">
+              <a:buNone/>
+            </a:pPr>
+            <a:r>
+              <a:rPr lang="en-US" sz="1100" b="1" kern="0" spc="100" dirty="0">
                 <a:solidFill>
                   <a:srgbClr val="F4623A"/>
                 </a:solidFill>
@@ -4323,7 +4089,7 @@
           <a:bodyPr wrap="square" rtlCol="0" anchor="t"/>
           <a:lstStyle/>
           <a:p>
-            <a:pPr indent="0" marL="0">
+            <a:pPr marL="0" indent="0">
               <a:buNone/>
             </a:pPr>
             <a:r>
@@ -4362,7 +4128,7 @@
           <a:bodyPr wrap="square" rtlCol="0" anchor="ctr"/>
           <a:lstStyle/>
           <a:p>
-            <a:pPr indent="0" marL="0">
+            <a:pPr marL="0" indent="0">
               <a:buNone/>
             </a:pPr>
             <a:r>
@@ -4401,7 +4167,7 @@
           <a:bodyPr wrap="square" rtlCol="0" anchor="t"/>
           <a:lstStyle/>
           <a:p>
-            <a:pPr indent="0" marL="0">
+            <a:pPr marL="0" indent="0">
               <a:buNone/>
             </a:pPr>
             <a:r>
@@ -4462,7 +4228,7 @@
           <a:bodyPr wrap="square" rtlCol="0" anchor="ctr"/>
           <a:lstStyle/>
           <a:p>
-            <a:pPr indent="0" marL="0">
+            <a:pPr marL="0" indent="0">
               <a:buNone/>
             </a:pPr>
             <a:r>
@@ -4501,11 +4267,11 @@
           <a:bodyPr wrap="square" rtlCol="0" anchor="ctr"/>
           <a:lstStyle/>
           <a:p>
-            <a:pPr indent="0" marL="0">
-              <a:buNone/>
-            </a:pPr>
-            <a:r>
-              <a:rPr lang="en-US" sz="1100" b="1" spc="100" kern="0" dirty="0">
+            <a:pPr marL="0" indent="0">
+              <a:buNone/>
+            </a:pPr>
+            <a:r>
+              <a:rPr lang="en-US" sz="1100" b="1" kern="0" spc="100" dirty="0">
                 <a:solidFill>
                   <a:srgbClr val="F4623A"/>
                 </a:solidFill>
@@ -4565,7 +4331,7 @@
           <a:bodyPr wrap="square" rtlCol="0" anchor="t"/>
           <a:lstStyle/>
           <a:p>
-            <a:pPr indent="0" marL="0">
+            <a:pPr marL="0" indent="0">
               <a:buNone/>
             </a:pPr>
             <a:r>
@@ -4604,7 +4370,7 @@
           <a:bodyPr wrap="square" rtlCol="0" anchor="ctr"/>
           <a:lstStyle/>
           <a:p>
-            <a:pPr indent="0" marL="0">
+            <a:pPr marL="0" indent="0">
               <a:buNone/>
             </a:pPr>
             <a:r>
@@ -4643,7 +4409,7 @@
           <a:bodyPr wrap="square" rtlCol="0" anchor="t"/>
           <a:lstStyle/>
           <a:p>
-            <a:pPr indent="0" marL="0">
+            <a:pPr marL="0" indent="0">
               <a:buNone/>
             </a:pPr>
             <a:r>
@@ -4704,7 +4470,7 @@
           <a:bodyPr wrap="square" rtlCol="0" anchor="ctr"/>
           <a:lstStyle/>
           <a:p>
-            <a:pPr indent="0" marL="0">
+            <a:pPr marL="0" indent="0">
               <a:buNone/>
             </a:pPr>
             <a:r>
@@ -4743,11 +4509,11 @@
           <a:bodyPr wrap="square" rtlCol="0" anchor="ctr"/>
           <a:lstStyle/>
           <a:p>
-            <a:pPr indent="0" marL="0">
-              <a:buNone/>
-            </a:pPr>
-            <a:r>
-              <a:rPr lang="en-US" sz="1100" b="1" spc="100" kern="0" dirty="0">
+            <a:pPr marL="0" indent="0">
+              <a:buNone/>
+            </a:pPr>
+            <a:r>
+              <a:rPr lang="en-US" sz="1100" b="1" kern="0" spc="100" dirty="0">
                 <a:solidFill>
                   <a:srgbClr val="F4623A"/>
                 </a:solidFill>
@@ -4807,7 +4573,7 @@
           <a:bodyPr wrap="square" rtlCol="0" anchor="t"/>
           <a:lstStyle/>
           <a:p>
-            <a:pPr indent="0" marL="0">
+            <a:pPr marL="0" indent="0">
               <a:buNone/>
             </a:pPr>
             <a:r>
@@ -4846,7 +4612,7 @@
           <a:bodyPr wrap="square" rtlCol="0" anchor="ctr"/>
           <a:lstStyle/>
           <a:p>
-            <a:pPr indent="0" marL="0">
+            <a:pPr marL="0" indent="0">
               <a:buNone/>
             </a:pPr>
             <a:r>
@@ -4885,7 +4651,7 @@
           <a:bodyPr wrap="square" rtlCol="0" anchor="t"/>
           <a:lstStyle/>
           <a:p>
-            <a:pPr indent="0" marL="0">
+            <a:pPr marL="0" indent="0">
               <a:buNone/>
             </a:pPr>
             <a:r>
@@ -4924,7 +4690,7 @@
           <a:bodyPr wrap="square" rtlCol="0" anchor="ctr"/>
           <a:lstStyle/>
           <a:p>
-            <a:pPr indent="0" marL="0">
+            <a:pPr marL="0" indent="0">
               <a:buNone/>
             </a:pPr>
             <a:r>
@@ -4963,7 +4729,7 @@
           <a:bodyPr wrap="square" rtlCol="0" anchor="ctr"/>
           <a:lstStyle/>
           <a:p>
-            <a:pPr algn="l" indent="0" marL="0">
+            <a:pPr marL="0" indent="0" algn="l">
               <a:buNone/>
             </a:pPr>
             <a:r>
@@ -5002,7 +4768,7 @@
           <a:bodyPr wrap="square" rtlCol="0" anchor="ctr"/>
           <a:lstStyle/>
           <a:p>
-            <a:pPr algn="r" indent="0" marL="0">
+            <a:pPr marL="0" indent="0" algn="r">
               <a:buNone/>
             </a:pPr>
             <a:r>
@@ -5036,6 +4802,7 @@
         <a:solidFill>
           <a:srgbClr val="FFFFFF"/>
         </a:solidFill>
+        <a:effectLst/>
       </p:bgPr>
     </p:bg>
     <p:spTree>
@@ -5073,7 +4840,7 @@
           <a:bodyPr wrap="square" rtlCol="0" anchor="ctr"/>
           <a:lstStyle/>
           <a:p>
-            <a:pPr indent="0" marL="0">
+            <a:pPr marL="0" indent="0">
               <a:buNone/>
             </a:pPr>
             <a:r>
@@ -5112,7 +4879,7 @@
           <a:bodyPr wrap="square" rtlCol="0" anchor="ctr"/>
           <a:lstStyle/>
           <a:p>
-            <a:pPr indent="0" marL="0">
+            <a:pPr marL="0" indent="0">
               <a:buNone/>
             </a:pPr>
             <a:r>
@@ -5132,7 +4899,7 @@
       </p:sp>
       <p:graphicFrame>
         <p:nvGraphicFramePr>
-          <p:cNvPr id="4" name="Chart 0" descr=""/>
+          <p:cNvPr id="4" name="Chart 0"/>
           <p:cNvGraphicFramePr/>
           <p:nvPr/>
         </p:nvGraphicFramePr>
@@ -5140,9 +4907,9 @@
           <a:off x="548640" y="1600200"/>
           <a:ext cx="6126480" cy="4480560"/>
         </p:xfrm>
-        <a:graphic xmlns:a="http://schemas.openxmlformats.org/drawingml/2006/main">
+        <a:graphic>
           <a:graphicData uri="http://schemas.openxmlformats.org/drawingml/2006/chart">
-            <c:chart xmlns:c="http://schemas.openxmlformats.org/drawingml/2006/chart" r:id="rId1"/>
+            <c:chart xmlns:c="http://schemas.openxmlformats.org/drawingml/2006/chart" xmlns:r="http://schemas.openxmlformats.org/officeDocument/2006/relationships" r:id="rId3"/>
           </a:graphicData>
         </a:graphic>
       </p:graphicFrame>
@@ -5189,7 +4956,7 @@
           <a:bodyPr wrap="square" rtlCol="0" anchor="ctr"/>
           <a:lstStyle/>
           <a:p>
-            <a:pPr indent="0" marL="0">
+            <a:pPr marL="0" indent="0">
               <a:buNone/>
             </a:pPr>
             <a:r>
@@ -5228,7 +4995,7 @@
           <a:bodyPr wrap="square" rtlCol="0" anchor="ctr"/>
           <a:lstStyle/>
           <a:p>
-            <a:pPr indent="0" marL="0">
+            <a:pPr marL="0" indent="0">
               <a:buNone/>
             </a:pPr>
             <a:r>
@@ -5289,7 +5056,7 @@
           <a:bodyPr wrap="square" rtlCol="0" anchor="ctr"/>
           <a:lstStyle/>
           <a:p>
-            <a:pPr indent="0" marL="0">
+            <a:pPr marL="0" indent="0">
               <a:buNone/>
             </a:pPr>
             <a:r>
@@ -5328,7 +5095,7 @@
           <a:bodyPr wrap="square" rtlCol="0" anchor="ctr"/>
           <a:lstStyle/>
           <a:p>
-            <a:pPr indent="0" marL="0">
+            <a:pPr marL="0" indent="0">
               <a:buNone/>
             </a:pPr>
             <a:r>
@@ -5389,7 +5156,7 @@
           <a:bodyPr wrap="square" rtlCol="0" anchor="ctr"/>
           <a:lstStyle/>
           <a:p>
-            <a:pPr indent="0" marL="0">
+            <a:pPr marL="0" indent="0">
               <a:buNone/>
             </a:pPr>
             <a:r>
@@ -5428,7 +5195,7 @@
           <a:bodyPr wrap="square" rtlCol="0" anchor="ctr"/>
           <a:lstStyle/>
           <a:p>
-            <a:pPr indent="0" marL="0">
+            <a:pPr marL="0" indent="0">
               <a:buNone/>
             </a:pPr>
             <a:r>
@@ -5489,7 +5256,7 @@
           <a:bodyPr wrap="square" rtlCol="0" anchor="ctr"/>
           <a:lstStyle/>
           <a:p>
-            <a:pPr indent="0" marL="0">
+            <a:pPr marL="0" indent="0">
               <a:buNone/>
             </a:pPr>
             <a:r>
@@ -5528,7 +5295,7 @@
           <a:bodyPr wrap="square" rtlCol="0" anchor="ctr"/>
           <a:lstStyle/>
           <a:p>
-            <a:pPr indent="0" marL="0">
+            <a:pPr marL="0" indent="0">
               <a:buNone/>
             </a:pPr>
             <a:r>
@@ -5567,7 +5334,7 @@
           <a:bodyPr wrap="square" rtlCol="0" anchor="ctr"/>
           <a:lstStyle/>
           <a:p>
-            <a:pPr indent="0" marL="0">
+            <a:pPr marL="0" indent="0">
               <a:buNone/>
             </a:pPr>
             <a:r>
@@ -5606,7 +5373,7 @@
           <a:bodyPr wrap="square" rtlCol="0" anchor="ctr"/>
           <a:lstStyle/>
           <a:p>
-            <a:pPr algn="l" indent="0" marL="0">
+            <a:pPr marL="0" indent="0" algn="l">
               <a:buNone/>
             </a:pPr>
             <a:r>
@@ -5645,7 +5412,7 @@
           <a:bodyPr wrap="square" rtlCol="0" anchor="ctr"/>
           <a:lstStyle/>
           <a:p>
-            <a:pPr algn="r" indent="0" marL="0">
+            <a:pPr marL="0" indent="0" algn="r">
               <a:buNone/>
             </a:pPr>
             <a:r>
@@ -5679,6 +5446,7 @@
         <a:solidFill>
           <a:srgbClr val="FFFFFF"/>
         </a:solidFill>
+        <a:effectLst/>
       </p:bgPr>
     </p:bg>
     <p:spTree>
@@ -5716,7 +5484,7 @@
           <a:bodyPr wrap="square" rtlCol="0" anchor="ctr"/>
           <a:lstStyle/>
           <a:p>
-            <a:pPr indent="0" marL="0">
+            <a:pPr marL="0" indent="0">
               <a:buNone/>
             </a:pPr>
             <a:r>
@@ -5755,7 +5523,7 @@
           <a:bodyPr wrap="square" rtlCol="0" anchor="ctr"/>
           <a:lstStyle/>
           <a:p>
-            <a:pPr indent="0" marL="0">
+            <a:pPr marL="0" indent="0">
               <a:buNone/>
             </a:pPr>
             <a:r>
@@ -5795,251 +5563,7 @@
       </p:sp>
       <p:pic>
         <p:nvPicPr>
-          <p:cNvPr id="5" name="Image 0" descr="icon_star.png">    </p:cNvPr>
-          <p:cNvPicPr>
-            <a:picLocks noChangeAspect="1"/>
-          </p:cNvPicPr>
-          <p:nvPr/>
-        </p:nvPicPr>
-        <p:blipFill>
-          <a:blip r:embed="rId1"/>
-          <a:stretch>
-            <a:fillRect/>
-          </a:stretch>
-        </p:blipFill>
-        <p:spPr>
-          <a:xfrm>
-            <a:off x="715061" y="1903781"/>
-            <a:ext cx="307238" cy="307238"/>
-          </a:xfrm>
-          <a:prstGeom prst="rect">
-            <a:avLst/>
-          </a:prstGeom>
-        </p:spPr>
-      </p:pic>
-      <p:sp>
-        <p:nvSpPr>
-          <p:cNvPr id="6" name="Text 3"/>
-          <p:cNvSpPr/>
-          <p:nvPr/>
-        </p:nvSpPr>
-        <p:spPr>
-          <a:xfrm>
-            <a:off x="1417320" y="1719072"/>
-            <a:ext cx="2743200" cy="365760"/>
-          </a:xfrm>
-          <a:prstGeom prst="rect">
-            <a:avLst/>
-          </a:prstGeom>
-          <a:noFill/>
-          <a:ln/>
-        </p:spPr>
-        <p:txBody>
-          <a:bodyPr wrap="square" rtlCol="0" anchor="ctr"/>
-          <a:lstStyle/>
-          <a:p>
-            <a:pPr indent="0" marL="0">
-              <a:buNone/>
-            </a:pPr>
-            <a:r>
-              <a:rPr lang="en-US" sz="1500" b="1" dirty="0">
-                <a:solidFill>
-                  <a:srgbClr val="1E2761"/>
-                </a:solidFill>
-                <a:latin typeface="Calibri" pitchFamily="34" charset="0"/>
-                <a:ea typeface="Calibri" pitchFamily="34" charset="-122"/>
-                <a:cs typeface="Calibri" pitchFamily="34" charset="-120"/>
-              </a:rPr>
-              <a:t>Forte valeur</a:t>
-            </a:r>
-            <a:endParaRPr lang="en-US" sz="1500" dirty="0"/>
-          </a:p>
-        </p:txBody>
-      </p:sp>
-      <p:sp>
-        <p:nvSpPr>
-          <p:cNvPr id="7" name="Text 4"/>
-          <p:cNvSpPr/>
-          <p:nvPr/>
-        </p:nvSpPr>
-        <p:spPr>
-          <a:xfrm>
-            <a:off x="1417320" y="2084832"/>
-            <a:ext cx="9875520" cy="640080"/>
-          </a:xfrm>
-          <a:prstGeom prst="rect">
-            <a:avLst/>
-          </a:prstGeom>
-          <a:noFill/>
-          <a:ln/>
-        </p:spPr>
-        <p:txBody>
-          <a:bodyPr wrap="square" rtlCol="0" anchor="t"/>
-          <a:lstStyle/>
-          <a:p>
-            <a:pPr indent="0" marL="0">
-              <a:buNone/>
-            </a:pPr>
-            <a:r>
-              <a:rPr lang="en-US" sz="1300" dirty="0">
-                <a:solidFill>
-                  <a:srgbClr val="1B1F2A"/>
-                </a:solidFill>
-                <a:latin typeface="Calibri" pitchFamily="34" charset="0"/>
-                <a:ea typeface="Calibri" pitchFamily="34" charset="-122"/>
-                <a:cs typeface="Calibri" pitchFamily="34" charset="-120"/>
-              </a:rPr>
-              <a:t>Programme de fidélité, recommandations de produits complémentaires, offres premium, communication personnalisée.</a:t>
-            </a:r>
-            <a:endParaRPr lang="en-US" sz="1300" dirty="0"/>
-          </a:p>
-        </p:txBody>
-      </p:sp>
-      <p:sp>
-        <p:nvSpPr>
-          <p:cNvPr id="8" name="Shape 5"/>
-          <p:cNvSpPr/>
-          <p:nvPr/>
-        </p:nvSpPr>
-        <p:spPr>
-          <a:xfrm>
-            <a:off x="548640" y="2926080"/>
-            <a:ext cx="640080" cy="640080"/>
-          </a:xfrm>
-          <a:prstGeom prst="ellipse">
-            <a:avLst/>
-          </a:prstGeom>
-          <a:solidFill>
-            <a:srgbClr val="1E2761"/>
-          </a:solidFill>
-          <a:ln/>
-        </p:spPr>
-      </p:sp>
-      <p:pic>
-        <p:nvPicPr>
-          <p:cNvPr id="9" name="Image 1" descr="icon_layers.png">    </p:cNvPr>
-          <p:cNvPicPr>
-            <a:picLocks noChangeAspect="1"/>
-          </p:cNvPicPr>
-          <p:nvPr/>
-        </p:nvPicPr>
-        <p:blipFill>
-          <a:blip r:embed="rId2"/>
-          <a:stretch>
-            <a:fillRect/>
-          </a:stretch>
-        </p:blipFill>
-        <p:spPr>
-          <a:xfrm>
-            <a:off x="715061" y="3092501"/>
-            <a:ext cx="307238" cy="307238"/>
-          </a:xfrm>
-          <a:prstGeom prst="rect">
-            <a:avLst/>
-          </a:prstGeom>
-        </p:spPr>
-      </p:pic>
-      <p:sp>
-        <p:nvSpPr>
-          <p:cNvPr id="10" name="Text 6"/>
-          <p:cNvSpPr/>
-          <p:nvPr/>
-        </p:nvSpPr>
-        <p:spPr>
-          <a:xfrm>
-            <a:off x="1417320" y="2907792"/>
-            <a:ext cx="2743200" cy="365760"/>
-          </a:xfrm>
-          <a:prstGeom prst="rect">
-            <a:avLst/>
-          </a:prstGeom>
-          <a:noFill/>
-          <a:ln/>
-        </p:spPr>
-        <p:txBody>
-          <a:bodyPr wrap="square" rtlCol="0" anchor="ctr"/>
-          <a:lstStyle/>
-          <a:p>
-            <a:pPr indent="0" marL="0">
-              <a:buNone/>
-            </a:pPr>
-            <a:r>
-              <a:rPr lang="en-US" sz="1500" b="1" dirty="0">
-                <a:solidFill>
-                  <a:srgbClr val="1E2761"/>
-                </a:solidFill>
-                <a:latin typeface="Calibri" pitchFamily="34" charset="0"/>
-                <a:ea typeface="Calibri" pitchFamily="34" charset="-122"/>
-                <a:cs typeface="Calibri" pitchFamily="34" charset="-120"/>
-              </a:rPr>
-              <a:t>Intermédiaire</a:t>
-            </a:r>
-            <a:endParaRPr lang="en-US" sz="1500" dirty="0"/>
-          </a:p>
-        </p:txBody>
-      </p:sp>
-      <p:sp>
-        <p:nvSpPr>
-          <p:cNvPr id="11" name="Text 7"/>
-          <p:cNvSpPr/>
-          <p:nvPr/>
-        </p:nvSpPr>
-        <p:spPr>
-          <a:xfrm>
-            <a:off x="1417320" y="3273552"/>
-            <a:ext cx="9875520" cy="640080"/>
-          </a:xfrm>
-          <a:prstGeom prst="rect">
-            <a:avLst/>
-          </a:prstGeom>
-          <a:noFill/>
-          <a:ln/>
-        </p:spPr>
-        <p:txBody>
-          <a:bodyPr wrap="square" rtlCol="0" anchor="t"/>
-          <a:lstStyle/>
-          <a:p>
-            <a:pPr indent="0" marL="0">
-              <a:buNone/>
-            </a:pPr>
-            <a:r>
-              <a:rPr lang="en-US" sz="1300" dirty="0">
-                <a:solidFill>
-                  <a:srgbClr val="1B1F2A"/>
-                </a:solidFill>
-                <a:latin typeface="Calibri" pitchFamily="34" charset="0"/>
-                <a:ea typeface="Calibri" pitchFamily="34" charset="-122"/>
-                <a:cs typeface="Calibri" pitchFamily="34" charset="-120"/>
-              </a:rPr>
-              <a:t>Bundles, remises conditionnelles, contenus pédagogiques ciblés, relance après achat.</a:t>
-            </a:r>
-            <a:endParaRPr lang="en-US" sz="1300" dirty="0"/>
-          </a:p>
-        </p:txBody>
-      </p:sp>
-      <p:sp>
-        <p:nvSpPr>
-          <p:cNvPr id="12" name="Shape 8"/>
-          <p:cNvSpPr/>
-          <p:nvPr/>
-        </p:nvSpPr>
-        <p:spPr>
-          <a:xfrm>
-            <a:off x="548640" y="4114800"/>
-            <a:ext cx="640080" cy="640080"/>
-          </a:xfrm>
-          <a:prstGeom prst="ellipse">
-            <a:avLst/>
-          </a:prstGeom>
-          <a:solidFill>
-            <a:srgbClr val="1E2761"/>
-          </a:solidFill>
-          <a:ln/>
-        </p:spPr>
-      </p:sp>
-      <p:pic>
-        <p:nvPicPr>
-          <p:cNvPr id="13" name="Image 2" descr="icon_refresh.png">    </p:cNvPr>
+          <p:cNvPr id="5" name="Image 0" descr="icon_star.png"/>
           <p:cNvPicPr>
             <a:picLocks noChangeAspect="1"/>
           </p:cNvPicPr>
@@ -6053,7 +5577,7 @@
         </p:blipFill>
         <p:spPr>
           <a:xfrm>
-            <a:off x="715061" y="4281221"/>
+            <a:off x="715061" y="1903781"/>
             <a:ext cx="307238" cy="307238"/>
           </a:xfrm>
           <a:prstGeom prst="rect">
@@ -6063,13 +5587,13 @@
       </p:pic>
       <p:sp>
         <p:nvSpPr>
-          <p:cNvPr id="14" name="Text 9"/>
-          <p:cNvSpPr/>
-          <p:nvPr/>
-        </p:nvSpPr>
-        <p:spPr>
-          <a:xfrm>
-            <a:off x="1417320" y="4096512"/>
+          <p:cNvPr id="6" name="Text 3"/>
+          <p:cNvSpPr/>
+          <p:nvPr/>
+        </p:nvSpPr>
+        <p:spPr>
+          <a:xfrm>
+            <a:off x="1417320" y="1719072"/>
             <a:ext cx="2743200" cy="365760"/>
           </a:xfrm>
           <a:prstGeom prst="rect">
@@ -6082,7 +5606,7 @@
           <a:bodyPr wrap="square" rtlCol="0" anchor="ctr"/>
           <a:lstStyle/>
           <a:p>
-            <a:pPr indent="0" marL="0">
+            <a:pPr marL="0" indent="0">
               <a:buNone/>
             </a:pPr>
             <a:r>
@@ -6094,7 +5618,7 @@
                 <a:ea typeface="Calibri" pitchFamily="34" charset="-122"/>
                 <a:cs typeface="Calibri" pitchFamily="34" charset="-120"/>
               </a:rPr>
-              <a:t>Faible activité</a:t>
+              <a:t>Forte valeur</a:t>
             </a:r>
             <a:endParaRPr lang="en-US" sz="1500" dirty="0"/>
           </a:p>
@@ -6102,13 +5626,13 @@
       </p:sp>
       <p:sp>
         <p:nvSpPr>
-          <p:cNvPr id="15" name="Text 10"/>
-          <p:cNvSpPr/>
-          <p:nvPr/>
-        </p:nvSpPr>
-        <p:spPr>
-          <a:xfrm>
-            <a:off x="1417320" y="4462272"/>
+          <p:cNvPr id="7" name="Text 4"/>
+          <p:cNvSpPr/>
+          <p:nvPr/>
+        </p:nvSpPr>
+        <p:spPr>
+          <a:xfrm>
+            <a:off x="1417320" y="2084832"/>
             <a:ext cx="9875520" cy="640080"/>
           </a:xfrm>
           <a:prstGeom prst="rect">
@@ -6121,7 +5645,7 @@
           <a:bodyPr wrap="square" rtlCol="0" anchor="t"/>
           <a:lstStyle/>
           <a:p>
-            <a:pPr indent="0" marL="0">
+            <a:pPr marL="0" indent="0">
               <a:buNone/>
             </a:pPr>
             <a:r>
@@ -6133,7 +5657,7 @@
                 <a:ea typeface="Calibri" pitchFamily="34" charset="-122"/>
                 <a:cs typeface="Calibri" pitchFamily="34" charset="-120"/>
               </a:rPr>
-              <a:t>Retargeting e-mail et réseaux sociaux, offre de retour limitée dans le temps, rappel des avantages.</a:t>
+              <a:t>Programme de fidélité, recommandations de produits complémentaires, offres premium, communication personnalisée.</a:t>
             </a:r>
             <a:endParaRPr lang="en-US" sz="1300" dirty="0"/>
           </a:p>
@@ -6141,19 +5665,17 @@
       </p:sp>
       <p:sp>
         <p:nvSpPr>
-          <p:cNvPr id="16" name="Shape 11"/>
-          <p:cNvSpPr/>
-          <p:nvPr/>
-        </p:nvSpPr>
-        <p:spPr>
-          <a:xfrm>
-            <a:off x="548640" y="5349240"/>
-            <a:ext cx="11064240" cy="1051560"/>
-          </a:xfrm>
-          <a:prstGeom prst="roundRect">
-            <a:avLst>
-              <a:gd name="adj" fmla="val 6957"/>
-            </a:avLst>
+          <p:cNvPr id="8" name="Shape 5"/>
+          <p:cNvSpPr/>
+          <p:nvPr/>
+        </p:nvSpPr>
+        <p:spPr>
+          <a:xfrm>
+            <a:off x="548640" y="2926080"/>
+            <a:ext cx="640080" cy="640080"/>
+          </a:xfrm>
+          <a:prstGeom prst="ellipse">
+            <a:avLst/>
           </a:prstGeom>
           <a:solidFill>
             <a:srgbClr val="1E2761"/>
@@ -6161,29 +5683,9 @@
           <a:ln/>
         </p:spPr>
       </p:sp>
-      <p:sp>
-        <p:nvSpPr>
-          <p:cNvPr id="17" name="Shape 12"/>
-          <p:cNvSpPr/>
-          <p:nvPr/>
-        </p:nvSpPr>
-        <p:spPr>
-          <a:xfrm>
-            <a:off x="822960" y="5522976"/>
-            <a:ext cx="621792" cy="621792"/>
-          </a:xfrm>
-          <a:prstGeom prst="ellipse">
-            <a:avLst/>
-          </a:prstGeom>
-          <a:solidFill>
-            <a:srgbClr val="F4623A"/>
-          </a:solidFill>
-          <a:ln/>
-        </p:spPr>
-      </p:sp>
       <p:pic>
         <p:nvPicPr>
-          <p:cNvPr id="18" name="Image 3" descr="icon_compass.png">    </p:cNvPr>
+          <p:cNvPr id="9" name="Image 1" descr="icon_layers.png"/>
           <p:cNvPicPr>
             <a:picLocks noChangeAspect="1"/>
           </p:cNvPicPr>
@@ -6197,8 +5699,8 @@
         </p:blipFill>
         <p:spPr>
           <a:xfrm>
-            <a:off x="984626" y="5684642"/>
-            <a:ext cx="298460" cy="298460"/>
+            <a:off x="715061" y="3092501"/>
+            <a:ext cx="307238" cy="307238"/>
           </a:xfrm>
           <a:prstGeom prst="rect">
             <a:avLst/>
@@ -6207,14 +5709,14 @@
       </p:pic>
       <p:sp>
         <p:nvSpPr>
-          <p:cNvPr id="19" name="Text 13"/>
-          <p:cNvSpPr/>
-          <p:nvPr/>
-        </p:nvSpPr>
-        <p:spPr>
-          <a:xfrm>
-            <a:off x="1691640" y="5449824"/>
-            <a:ext cx="9692640" cy="320040"/>
+          <p:cNvPr id="10" name="Text 6"/>
+          <p:cNvSpPr/>
+          <p:nvPr/>
+        </p:nvSpPr>
+        <p:spPr>
+          <a:xfrm>
+            <a:off x="1417320" y="2907792"/>
+            <a:ext cx="2743200" cy="365760"/>
           </a:xfrm>
           <a:prstGeom prst="rect">
             <a:avLst/>
@@ -6226,34 +5728,34 @@
           <a:bodyPr wrap="square" rtlCol="0" anchor="ctr"/>
           <a:lstStyle/>
           <a:p>
-            <a:pPr indent="0" marL="0">
-              <a:buNone/>
-            </a:pPr>
-            <a:r>
-              <a:rPr lang="en-US" sz="1300" b="1" dirty="0">
-                <a:solidFill>
-                  <a:srgbClr val="FFFFFF"/>
+            <a:pPr marL="0" indent="0">
+              <a:buNone/>
+            </a:pPr>
+            <a:r>
+              <a:rPr lang="en-US" sz="1500" b="1" dirty="0">
+                <a:solidFill>
+                  <a:srgbClr val="1E2761"/>
                 </a:solidFill>
                 <a:latin typeface="Calibri" pitchFamily="34" charset="0"/>
                 <a:ea typeface="Calibri" pitchFamily="34" charset="-122"/>
                 <a:cs typeface="Calibri" pitchFamily="34" charset="-120"/>
               </a:rPr>
-              <a:t>IA générative, sous contrôle humain</a:t>
-            </a:r>
-            <a:endParaRPr lang="en-US" sz="1300" dirty="0"/>
-          </a:p>
-        </p:txBody>
-      </p:sp>
-      <p:sp>
-        <p:nvSpPr>
-          <p:cNvPr id="20" name="Text 14"/>
-          <p:cNvSpPr/>
-          <p:nvPr/>
-        </p:nvSpPr>
-        <p:spPr>
-          <a:xfrm>
-            <a:off x="1691640" y="5760720"/>
-            <a:ext cx="9692640" cy="502920"/>
+              <a:t>Intermédiaire</a:t>
+            </a:r>
+            <a:endParaRPr lang="en-US" sz="1500" dirty="0"/>
+          </a:p>
+        </p:txBody>
+      </p:sp>
+      <p:sp>
+        <p:nvSpPr>
+          <p:cNvPr id="11" name="Text 7"/>
+          <p:cNvSpPr/>
+          <p:nvPr/>
+        </p:nvSpPr>
+        <p:spPr>
+          <a:xfrm>
+            <a:off x="1417320" y="3273552"/>
+            <a:ext cx="9875520" cy="640080"/>
           </a:xfrm>
           <a:prstGeom prst="rect">
             <a:avLst/>
@@ -6265,34 +5767,78 @@
           <a:bodyPr wrap="square" rtlCol="0" anchor="t"/>
           <a:lstStyle/>
           <a:p>
-            <a:pPr indent="0" marL="0">
-              <a:buNone/>
-            </a:pPr>
-            <a:r>
-              <a:rPr lang="en-US" sz="1200" dirty="0">
-                <a:solidFill>
-                  <a:srgbClr val="CADCFC"/>
+            <a:pPr marL="0" indent="0">
+              <a:buNone/>
+            </a:pPr>
+            <a:r>
+              <a:rPr lang="en-US" sz="1300" dirty="0">
+                <a:solidFill>
+                  <a:srgbClr val="1B1F2A"/>
                 </a:solidFill>
                 <a:latin typeface="Calibri" pitchFamily="34" charset="0"/>
                 <a:ea typeface="Calibri" pitchFamily="34" charset="-122"/>
                 <a:cs typeface="Calibri" pitchFamily="34" charset="-120"/>
               </a:rPr>
-              <a:t>Production de variantes de contenus par segment (objet, accroche, visuel), avec validation des règles métier et des KPI avant diffusion.</a:t>
-            </a:r>
-            <a:endParaRPr lang="en-US" sz="1200" dirty="0"/>
-          </a:p>
-        </p:txBody>
-      </p:sp>
-      <p:sp>
-        <p:nvSpPr>
-          <p:cNvPr id="21" name="Text 15"/>
-          <p:cNvSpPr/>
-          <p:nvPr/>
-        </p:nvSpPr>
-        <p:spPr>
-          <a:xfrm>
-            <a:off x="457200" y="6528816"/>
-            <a:ext cx="7315200" cy="274320"/>
+              <a:t>Bundles, remises conditionnelles, contenus pédagogiques ciblés, relance après achat.</a:t>
+            </a:r>
+            <a:endParaRPr lang="en-US" sz="1300" dirty="0"/>
+          </a:p>
+        </p:txBody>
+      </p:sp>
+      <p:sp>
+        <p:nvSpPr>
+          <p:cNvPr id="12" name="Shape 8"/>
+          <p:cNvSpPr/>
+          <p:nvPr/>
+        </p:nvSpPr>
+        <p:spPr>
+          <a:xfrm>
+            <a:off x="548640" y="4114800"/>
+            <a:ext cx="640080" cy="640080"/>
+          </a:xfrm>
+          <a:prstGeom prst="ellipse">
+            <a:avLst/>
+          </a:prstGeom>
+          <a:solidFill>
+            <a:srgbClr val="1E2761"/>
+          </a:solidFill>
+          <a:ln/>
+        </p:spPr>
+      </p:sp>
+      <p:pic>
+        <p:nvPicPr>
+          <p:cNvPr id="13" name="Image 2" descr="icon_refresh.png"/>
+          <p:cNvPicPr>
+            <a:picLocks noChangeAspect="1"/>
+          </p:cNvPicPr>
+          <p:nvPr/>
+        </p:nvPicPr>
+        <p:blipFill>
+          <a:blip r:embed="rId5"/>
+          <a:stretch>
+            <a:fillRect/>
+          </a:stretch>
+        </p:blipFill>
+        <p:spPr>
+          <a:xfrm>
+            <a:off x="715061" y="4281221"/>
+            <a:ext cx="307238" cy="307238"/>
+          </a:xfrm>
+          <a:prstGeom prst="rect">
+            <a:avLst/>
+          </a:prstGeom>
+        </p:spPr>
+      </p:pic>
+      <p:sp>
+        <p:nvSpPr>
+          <p:cNvPr id="14" name="Text 9"/>
+          <p:cNvSpPr/>
+          <p:nvPr/>
+        </p:nvSpPr>
+        <p:spPr>
+          <a:xfrm>
+            <a:off x="1417320" y="4096512"/>
+            <a:ext cx="2743200" cy="365760"/>
           </a:xfrm>
           <a:prstGeom prst="rect">
             <a:avLst/>
@@ -6304,18 +5850,240 @@
           <a:bodyPr wrap="square" rtlCol="0" anchor="ctr"/>
           <a:lstStyle/>
           <a:p>
-            <a:pPr algn="l" indent="0" marL="0">
-              <a:buNone/>
-            </a:pPr>
-            <a:r>
-              <a:rPr lang="en-US" sz="900" dirty="0">
-                <a:solidFill>
-                  <a:srgbClr val="5B6270"/>
+            <a:pPr marL="0" indent="0">
+              <a:buNone/>
+            </a:pPr>
+            <a:r>
+              <a:rPr lang="en-US" sz="1500" b="1" dirty="0">
+                <a:solidFill>
+                  <a:srgbClr val="1E2761"/>
                 </a:solidFill>
                 <a:latin typeface="Calibri" pitchFamily="34" charset="0"/>
                 <a:ea typeface="Calibri" pitchFamily="34" charset="-122"/>
                 <a:cs typeface="Calibri" pitchFamily="34" charset="-120"/>
               </a:rPr>
+              <a:t>Faible activité</a:t>
+            </a:r>
+            <a:endParaRPr lang="en-US" sz="1500" dirty="0"/>
+          </a:p>
+        </p:txBody>
+      </p:sp>
+      <p:sp>
+        <p:nvSpPr>
+          <p:cNvPr id="15" name="Text 10"/>
+          <p:cNvSpPr/>
+          <p:nvPr/>
+        </p:nvSpPr>
+        <p:spPr>
+          <a:xfrm>
+            <a:off x="1417320" y="4462272"/>
+            <a:ext cx="9875520" cy="640080"/>
+          </a:xfrm>
+          <a:prstGeom prst="rect">
+            <a:avLst/>
+          </a:prstGeom>
+          <a:noFill/>
+          <a:ln/>
+        </p:spPr>
+        <p:txBody>
+          <a:bodyPr wrap="square" rtlCol="0" anchor="t"/>
+          <a:lstStyle/>
+          <a:p>
+            <a:pPr marL="0" indent="0">
+              <a:buNone/>
+            </a:pPr>
+            <a:r>
+              <a:rPr lang="en-US" sz="1300" dirty="0">
+                <a:solidFill>
+                  <a:srgbClr val="1B1F2A"/>
+                </a:solidFill>
+                <a:latin typeface="Calibri" pitchFamily="34" charset="0"/>
+                <a:ea typeface="Calibri" pitchFamily="34" charset="-122"/>
+                <a:cs typeface="Calibri" pitchFamily="34" charset="-120"/>
+              </a:rPr>
+              <a:t>Retargeting e-mail et réseaux sociaux, offre de retour limitée dans le temps, rappel des avantages.</a:t>
+            </a:r>
+            <a:endParaRPr lang="en-US" sz="1300" dirty="0"/>
+          </a:p>
+        </p:txBody>
+      </p:sp>
+      <p:sp>
+        <p:nvSpPr>
+          <p:cNvPr id="16" name="Shape 11"/>
+          <p:cNvSpPr/>
+          <p:nvPr/>
+        </p:nvSpPr>
+        <p:spPr>
+          <a:xfrm>
+            <a:off x="548640" y="5349240"/>
+            <a:ext cx="11064240" cy="1051560"/>
+          </a:xfrm>
+          <a:prstGeom prst="roundRect">
+            <a:avLst>
+              <a:gd name="adj" fmla="val 6957"/>
+            </a:avLst>
+          </a:prstGeom>
+          <a:solidFill>
+            <a:srgbClr val="1E2761"/>
+          </a:solidFill>
+          <a:ln/>
+        </p:spPr>
+      </p:sp>
+      <p:sp>
+        <p:nvSpPr>
+          <p:cNvPr id="17" name="Shape 12"/>
+          <p:cNvSpPr/>
+          <p:nvPr/>
+        </p:nvSpPr>
+        <p:spPr>
+          <a:xfrm>
+            <a:off x="822960" y="5522976"/>
+            <a:ext cx="621792" cy="621792"/>
+          </a:xfrm>
+          <a:prstGeom prst="ellipse">
+            <a:avLst/>
+          </a:prstGeom>
+          <a:solidFill>
+            <a:srgbClr val="F4623A"/>
+          </a:solidFill>
+          <a:ln/>
+        </p:spPr>
+      </p:sp>
+      <p:pic>
+        <p:nvPicPr>
+          <p:cNvPr id="18" name="Image 3" descr="icon_compass.png"/>
+          <p:cNvPicPr>
+            <a:picLocks noChangeAspect="1"/>
+          </p:cNvPicPr>
+          <p:nvPr/>
+        </p:nvPicPr>
+        <p:blipFill>
+          <a:blip r:embed="rId6"/>
+          <a:stretch>
+            <a:fillRect/>
+          </a:stretch>
+        </p:blipFill>
+        <p:spPr>
+          <a:xfrm>
+            <a:off x="984626" y="5684642"/>
+            <a:ext cx="298460" cy="298460"/>
+          </a:xfrm>
+          <a:prstGeom prst="rect">
+            <a:avLst/>
+          </a:prstGeom>
+        </p:spPr>
+      </p:pic>
+      <p:sp>
+        <p:nvSpPr>
+          <p:cNvPr id="19" name="Text 13"/>
+          <p:cNvSpPr/>
+          <p:nvPr/>
+        </p:nvSpPr>
+        <p:spPr>
+          <a:xfrm>
+            <a:off x="1691640" y="5449824"/>
+            <a:ext cx="9692640" cy="320040"/>
+          </a:xfrm>
+          <a:prstGeom prst="rect">
+            <a:avLst/>
+          </a:prstGeom>
+          <a:noFill/>
+          <a:ln/>
+        </p:spPr>
+        <p:txBody>
+          <a:bodyPr wrap="square" rtlCol="0" anchor="ctr"/>
+          <a:lstStyle/>
+          <a:p>
+            <a:pPr marL="0" indent="0">
+              <a:buNone/>
+            </a:pPr>
+            <a:r>
+              <a:rPr lang="en-US" sz="1300" b="1" dirty="0">
+                <a:solidFill>
+                  <a:srgbClr val="FFFFFF"/>
+                </a:solidFill>
+                <a:latin typeface="Calibri" pitchFamily="34" charset="0"/>
+                <a:ea typeface="Calibri" pitchFamily="34" charset="-122"/>
+                <a:cs typeface="Calibri" pitchFamily="34" charset="-120"/>
+              </a:rPr>
+              <a:t>IA générative, sous contrôle humain</a:t>
+            </a:r>
+            <a:endParaRPr lang="en-US" sz="1300" dirty="0"/>
+          </a:p>
+        </p:txBody>
+      </p:sp>
+      <p:sp>
+        <p:nvSpPr>
+          <p:cNvPr id="20" name="Text 14"/>
+          <p:cNvSpPr/>
+          <p:nvPr/>
+        </p:nvSpPr>
+        <p:spPr>
+          <a:xfrm>
+            <a:off x="1691640" y="5760720"/>
+            <a:ext cx="9692640" cy="502920"/>
+          </a:xfrm>
+          <a:prstGeom prst="rect">
+            <a:avLst/>
+          </a:prstGeom>
+          <a:noFill/>
+          <a:ln/>
+        </p:spPr>
+        <p:txBody>
+          <a:bodyPr wrap="square" rtlCol="0" anchor="t"/>
+          <a:lstStyle/>
+          <a:p>
+            <a:pPr marL="0" indent="0">
+              <a:buNone/>
+            </a:pPr>
+            <a:r>
+              <a:rPr lang="en-US" sz="1200" dirty="0">
+                <a:solidFill>
+                  <a:srgbClr val="CADCFC"/>
+                </a:solidFill>
+                <a:latin typeface="Calibri" pitchFamily="34" charset="0"/>
+                <a:ea typeface="Calibri" pitchFamily="34" charset="-122"/>
+                <a:cs typeface="Calibri" pitchFamily="34" charset="-120"/>
+              </a:rPr>
+              <a:t>Production de variantes de contenus par segment (objet, accroche, visuel), avec validation des règles métier et des KPI avant diffusion.</a:t>
+            </a:r>
+            <a:endParaRPr lang="en-US" sz="1200" dirty="0"/>
+          </a:p>
+        </p:txBody>
+      </p:sp>
+      <p:sp>
+        <p:nvSpPr>
+          <p:cNvPr id="21" name="Text 15"/>
+          <p:cNvSpPr/>
+          <p:nvPr/>
+        </p:nvSpPr>
+        <p:spPr>
+          <a:xfrm>
+            <a:off x="457200" y="6528816"/>
+            <a:ext cx="7315200" cy="274320"/>
+          </a:xfrm>
+          <a:prstGeom prst="rect">
+            <a:avLst/>
+          </a:prstGeom>
+          <a:noFill/>
+          <a:ln/>
+        </p:spPr>
+        <p:txBody>
+          <a:bodyPr wrap="square" rtlCol="0" anchor="ctr"/>
+          <a:lstStyle/>
+          <a:p>
+            <a:pPr marL="0" indent="0" algn="l">
+              <a:buNone/>
+            </a:pPr>
+            <a:r>
+              <a:rPr lang="en-US" sz="900" dirty="0">
+                <a:solidFill>
+                  <a:srgbClr val="5B6270"/>
+                </a:solidFill>
+                <a:latin typeface="Calibri" pitchFamily="34" charset="0"/>
+                <a:ea typeface="Calibri" pitchFamily="34" charset="-122"/>
+                <a:cs typeface="Calibri" pitchFamily="34" charset="-120"/>
+              </a:rPr>
               <a:t>Analyse &amp; Optimisation Marketing  •  ENI Fianarantsoa</a:t>
             </a:r>
             <a:endParaRPr lang="en-US" sz="900" dirty="0"/>
@@ -6343,7 +6111,7 @@
           <a:bodyPr wrap="square" rtlCol="0" anchor="ctr"/>
           <a:lstStyle/>
           <a:p>
-            <a:pPr algn="r" indent="0" marL="0">
+            <a:pPr marL="0" indent="0" algn="r">
               <a:buNone/>
             </a:pPr>
             <a:r>
@@ -6377,6 +6145,7 @@
         <a:solidFill>
           <a:srgbClr val="141B47"/>
         </a:solidFill>
+        <a:effectLst/>
       </p:bgPr>
     </p:bg>
     <p:spTree>
@@ -6414,7 +6183,7 @@
           <a:bodyPr wrap="square" rtlCol="0" anchor="ctr"/>
           <a:lstStyle/>
           <a:p>
-            <a:pPr indent="0" marL="0">
+            <a:pPr marL="0" indent="0">
               <a:buNone/>
             </a:pPr>
             <a:r>
@@ -6476,14 +6245,14 @@
       </p:sp>
       <p:pic>
         <p:nvPicPr>
-          <p:cNvPr id="5" name="Image 0" descr="icon_alert.png">    </p:cNvPr>
+          <p:cNvPr id="5" name="Image 0" descr="icon_alert.png"/>
           <p:cNvPicPr>
             <a:picLocks noChangeAspect="1"/>
           </p:cNvPicPr>
           <p:nvPr/>
         </p:nvPicPr>
         <p:blipFill>
-          <a:blip r:embed="rId1"/>
+          <a:blip r:embed="rId3"/>
           <a:stretch>
             <a:fillRect/>
           </a:stretch>
@@ -6519,7 +6288,7 @@
           <a:bodyPr wrap="square" rtlCol="0" anchor="ctr"/>
           <a:lstStyle/>
           <a:p>
-            <a:pPr indent="0" marL="0">
+            <a:pPr marL="0" indent="0">
               <a:buNone/>
             </a:pPr>
             <a:r>
@@ -6560,10 +6329,34 @@
             <a:tbl>
               <a:tblPr/>
               <a:tblGrid>
-                <a:gridCol w="1737360"/>
-                <a:gridCol w="1554480"/>
-                <a:gridCol w="1554480"/>
-                <a:gridCol w="1554480"/>
+                <a:gridCol w="1737360">
+                  <a:extLst>
+                    <a:ext uri="{9D8B030D-6E8A-4147-A177-3AD203B41FA5}">
+                      <a16:colId xmlns:a16="http://schemas.microsoft.com/office/drawing/2014/main" val="20000"/>
+                    </a:ext>
+                  </a:extLst>
+                </a:gridCol>
+                <a:gridCol w="1554480">
+                  <a:extLst>
+                    <a:ext uri="{9D8B030D-6E8A-4147-A177-3AD203B41FA5}">
+                      <a16:colId xmlns:a16="http://schemas.microsoft.com/office/drawing/2014/main" val="20001"/>
+                    </a:ext>
+                  </a:extLst>
+                </a:gridCol>
+                <a:gridCol w="1554480">
+                  <a:extLst>
+                    <a:ext uri="{9D8B030D-6E8A-4147-A177-3AD203B41FA5}">
+                      <a16:colId xmlns:a16="http://schemas.microsoft.com/office/drawing/2014/main" val="20002"/>
+                    </a:ext>
+                  </a:extLst>
+                </a:gridCol>
+                <a:gridCol w="1554480">
+                  <a:extLst>
+                    <a:ext uri="{9D8B030D-6E8A-4147-A177-3AD203B41FA5}">
+                      <a16:colId xmlns:a16="http://schemas.microsoft.com/office/drawing/2014/main" val="20003"/>
+                    </a:ext>
+                  </a:extLst>
+                </a:gridCol>
               </a:tblGrid>
               <a:tr h="457200">
                 <a:tc>
@@ -6571,7 +6364,7 @@
                     <a:bodyPr/>
                     <a:lstStyle/>
                     <a:p>
-                      <a:pPr algn="ctr" indent="0" marL="0">
+                      <a:pPr marL="0" indent="0" algn="ctr">
                         <a:buNone/>
                       </a:pPr>
                       <a:r>
@@ -6592,7 +6385,7 @@
                       </a:endParaRPr>
                     </a:p>
                   </a:txBody>
-                  <a:tcPr marL="91440" marR="91440" marT="45720" marB="45720" anchor="ctr">
+                  <a:tcPr anchor="ctr">
                     <a:lnL w="12700" cap="flat" cmpd="sng" algn="ctr">
                       <a:solidFill>
                         <a:srgbClr val="141B47"/>
@@ -6639,7 +6432,7 @@
                     <a:bodyPr/>
                     <a:lstStyle/>
                     <a:p>
-                      <a:pPr algn="ctr" indent="0" marL="0">
+                      <a:pPr marL="0" indent="0" algn="ctr">
                         <a:buNone/>
                       </a:pPr>
                       <a:r>
@@ -6660,7 +6453,7 @@
                       </a:endParaRPr>
                     </a:p>
                   </a:txBody>
-                  <a:tcPr marL="91440" marR="91440" marT="45720" marB="45720" anchor="ctr">
+                  <a:tcPr anchor="ctr">
                     <a:lnL w="12700" cap="flat" cmpd="sng" algn="ctr">
                       <a:solidFill>
                         <a:srgbClr val="141B47"/>
@@ -6707,7 +6500,7 @@
                     <a:bodyPr/>
                     <a:lstStyle/>
                     <a:p>
-                      <a:pPr algn="ctr" indent="0" marL="0">
+                      <a:pPr marL="0" indent="0" algn="ctr">
                         <a:buNone/>
                       </a:pPr>
                       <a:r>
@@ -6728,7 +6521,7 @@
                       </a:endParaRPr>
                     </a:p>
                   </a:txBody>
-                  <a:tcPr marL="91440" marR="91440" marT="45720" marB="45720" anchor="ctr">
+                  <a:tcPr anchor="ctr">
                     <a:lnL w="12700" cap="flat" cmpd="sng" algn="ctr">
                       <a:solidFill>
                         <a:srgbClr val="141B47"/>
@@ -6775,7 +6568,7 @@
                     <a:bodyPr/>
                     <a:lstStyle/>
                     <a:p>
-                      <a:pPr algn="ctr" indent="0" marL="0">
+                      <a:pPr marL="0" indent="0" algn="ctr">
                         <a:buNone/>
                       </a:pPr>
                       <a:r>
@@ -6796,7 +6589,7 @@
                       </a:endParaRPr>
                     </a:p>
                   </a:txBody>
-                  <a:tcPr marL="91440" marR="91440" marT="45720" marB="45720" anchor="ctr">
+                  <a:tcPr anchor="ctr">
                     <a:lnL w="12700" cap="flat" cmpd="sng" algn="ctr">
                       <a:solidFill>
                         <a:srgbClr val="141B47"/>
@@ -6838,6 +6631,11 @@
                     </a:solidFill>
                   </a:tcPr>
                 </a:tc>
+                <a:extLst>
+                  <a:ext uri="{0D108BD9-81ED-4DB2-BD59-A6C34878D82A}">
+                    <a16:rowId xmlns:a16="http://schemas.microsoft.com/office/drawing/2014/main" val="10000"/>
+                  </a:ext>
+                </a:extLst>
               </a:tr>
               <a:tr h="457200">
                 <a:tc>
@@ -6845,7 +6643,7 @@
                     <a:bodyPr/>
                     <a:lstStyle/>
                     <a:p>
-                      <a:pPr algn="ctr" indent="0" marL="0">
+                      <a:pPr marL="0" indent="0" algn="ctr">
                         <a:buNone/>
                       </a:pPr>
                       <a:r>
@@ -6866,7 +6664,7 @@
                       </a:endParaRPr>
                     </a:p>
                   </a:txBody>
-                  <a:tcPr marL="91440" marR="91440" marT="45720" marB="45720" anchor="ctr">
+                  <a:tcPr anchor="ctr">
                     <a:lnL w="12700" cap="flat" cmpd="sng" algn="ctr">
                       <a:solidFill>
                         <a:srgbClr val="141B47"/>
@@ -6913,7 +6711,7 @@
                     <a:bodyPr/>
                     <a:lstStyle/>
                     <a:p>
-                      <a:pPr algn="ctr" indent="0" marL="0">
+                      <a:pPr marL="0" indent="0" algn="ctr">
                         <a:buNone/>
                       </a:pPr>
                       <a:r>
@@ -6934,7 +6732,7 @@
                       </a:endParaRPr>
                     </a:p>
                   </a:txBody>
-                  <a:tcPr marL="91440" marR="91440" marT="45720" marB="45720" anchor="ctr">
+                  <a:tcPr anchor="ctr">
                     <a:lnL w="12700" cap="flat" cmpd="sng" algn="ctr">
                       <a:solidFill>
                         <a:srgbClr val="141B47"/>
@@ -6981,7 +6779,7 @@
                     <a:bodyPr/>
                     <a:lstStyle/>
                     <a:p>
-                      <a:pPr algn="ctr" indent="0" marL="0">
+                      <a:pPr marL="0" indent="0" algn="ctr">
                         <a:buNone/>
                       </a:pPr>
                       <a:r>
@@ -7002,7 +6800,7 @@
                       </a:endParaRPr>
                     </a:p>
                   </a:txBody>
-                  <a:tcPr marL="91440" marR="91440" marT="45720" marB="45720" anchor="ctr">
+                  <a:tcPr anchor="ctr">
                     <a:lnL w="12700" cap="flat" cmpd="sng" algn="ctr">
                       <a:solidFill>
                         <a:srgbClr val="141B47"/>
@@ -7049,7 +6847,7 @@
                     <a:bodyPr/>
                     <a:lstStyle/>
                     <a:p>
-                      <a:pPr algn="ctr" indent="0" marL="0">
+                      <a:pPr marL="0" indent="0" algn="ctr">
                         <a:buNone/>
                       </a:pPr>
                       <a:r>
@@ -7070,7 +6868,7 @@
                       </a:endParaRPr>
                     </a:p>
                   </a:txBody>
-                  <a:tcPr marL="91440" marR="91440" marT="45720" marB="45720" anchor="ctr">
+                  <a:tcPr anchor="ctr">
                     <a:lnL w="12700" cap="flat" cmpd="sng" algn="ctr">
                       <a:solidFill>
                         <a:srgbClr val="141B47"/>
@@ -7112,6 +6910,11 @@
                     </a:solidFill>
                   </a:tcPr>
                 </a:tc>
+                <a:extLst>
+                  <a:ext uri="{0D108BD9-81ED-4DB2-BD59-A6C34878D82A}">
+                    <a16:rowId xmlns:a16="http://schemas.microsoft.com/office/drawing/2014/main" val="10001"/>
+                  </a:ext>
+                </a:extLst>
               </a:tr>
               <a:tr h="457200">
                 <a:tc>
@@ -7119,7 +6922,7 @@
                     <a:bodyPr/>
                     <a:lstStyle/>
                     <a:p>
-                      <a:pPr algn="ctr" indent="0" marL="0">
+                      <a:pPr marL="0" indent="0" algn="ctr">
                         <a:buNone/>
                       </a:pPr>
                       <a:r>
@@ -7140,7 +6943,7 @@
                       </a:endParaRPr>
                     </a:p>
                   </a:txBody>
-                  <a:tcPr marL="91440" marR="91440" marT="45720" marB="45720" anchor="ctr">
+                  <a:tcPr anchor="ctr">
                     <a:lnL w="12700" cap="flat" cmpd="sng" algn="ctr">
                       <a:solidFill>
                         <a:srgbClr val="141B47"/>
@@ -7187,7 +6990,7 @@
                     <a:bodyPr/>
                     <a:lstStyle/>
                     <a:p>
-                      <a:pPr algn="ctr" indent="0" marL="0">
+                      <a:pPr marL="0" indent="0" algn="ctr">
                         <a:buNone/>
                       </a:pPr>
                       <a:r>
@@ -7208,7 +7011,7 @@
                       </a:endParaRPr>
                     </a:p>
                   </a:txBody>
-                  <a:tcPr marL="91440" marR="91440" marT="45720" marB="45720" anchor="ctr">
+                  <a:tcPr anchor="ctr">
                     <a:lnL w="12700" cap="flat" cmpd="sng" algn="ctr">
                       <a:solidFill>
                         <a:srgbClr val="141B47"/>
@@ -7255,7 +7058,7 @@
                     <a:bodyPr/>
                     <a:lstStyle/>
                     <a:p>
-                      <a:pPr algn="ctr" indent="0" marL="0">
+                      <a:pPr marL="0" indent="0" algn="ctr">
                         <a:buNone/>
                       </a:pPr>
                       <a:r>
@@ -7276,7 +7079,7 @@
                       </a:endParaRPr>
                     </a:p>
                   </a:txBody>
-                  <a:tcPr marL="91440" marR="91440" marT="45720" marB="45720" anchor="ctr">
+                  <a:tcPr anchor="ctr">
                     <a:lnL w="12700" cap="flat" cmpd="sng" algn="ctr">
                       <a:solidFill>
                         <a:srgbClr val="141B47"/>
@@ -7323,7 +7126,7 @@
                     <a:bodyPr/>
                     <a:lstStyle/>
                     <a:p>
-                      <a:pPr algn="ctr" indent="0" marL="0">
+                      <a:pPr marL="0" indent="0" algn="ctr">
                         <a:buNone/>
                       </a:pPr>
                       <a:r>
@@ -7344,7 +7147,7 @@
                       </a:endParaRPr>
                     </a:p>
                   </a:txBody>
-                  <a:tcPr marL="91440" marR="91440" marT="45720" marB="45720" anchor="ctr">
+                  <a:tcPr anchor="ctr">
                     <a:lnL w="12700" cap="flat" cmpd="sng" algn="ctr">
                       <a:solidFill>
                         <a:srgbClr val="141B47"/>
@@ -7386,6 +7189,11 @@
                     </a:solidFill>
                   </a:tcPr>
                 </a:tc>
+                <a:extLst>
+                  <a:ext uri="{0D108BD9-81ED-4DB2-BD59-A6C34878D82A}">
+                    <a16:rowId xmlns:a16="http://schemas.microsoft.com/office/drawing/2014/main" val="10002"/>
+                  </a:ext>
+                </a:extLst>
               </a:tr>
               <a:tr h="457200">
                 <a:tc>
@@ -7393,7 +7201,7 @@
                     <a:bodyPr/>
                     <a:lstStyle/>
                     <a:p>
-                      <a:pPr algn="ctr" indent="0" marL="0">
+                      <a:pPr marL="0" indent="0" algn="ctr">
                         <a:buNone/>
                       </a:pPr>
                       <a:r>
@@ -7414,7 +7222,7 @@
                       </a:endParaRPr>
                     </a:p>
                   </a:txBody>
-                  <a:tcPr marL="91440" marR="91440" marT="45720" marB="45720" anchor="ctr">
+                  <a:tcPr anchor="ctr">
                     <a:lnL w="12700" cap="flat" cmpd="sng" algn="ctr">
                       <a:solidFill>
                         <a:srgbClr val="141B47"/>
@@ -7461,7 +7269,7 @@
                     <a:bodyPr/>
                     <a:lstStyle/>
                     <a:p>
-                      <a:pPr algn="ctr" indent="0" marL="0">
+                      <a:pPr marL="0" indent="0" algn="ctr">
                         <a:buNone/>
                       </a:pPr>
                       <a:r>
@@ -7482,7 +7290,7 @@
                       </a:endParaRPr>
                     </a:p>
                   </a:txBody>
-                  <a:tcPr marL="91440" marR="91440" marT="45720" marB="45720" anchor="ctr">
+                  <a:tcPr anchor="ctr">
                     <a:lnL w="12700" cap="flat" cmpd="sng" algn="ctr">
                       <a:solidFill>
                         <a:srgbClr val="141B47"/>
@@ -7529,7 +7337,7 @@
                     <a:bodyPr/>
                     <a:lstStyle/>
                     <a:p>
-                      <a:pPr algn="ctr" indent="0" marL="0">
+                      <a:pPr marL="0" indent="0" algn="ctr">
                         <a:buNone/>
                       </a:pPr>
                       <a:r>
@@ -7550,7 +7358,7 @@
                       </a:endParaRPr>
                     </a:p>
                   </a:txBody>
-                  <a:tcPr marL="91440" marR="91440" marT="45720" marB="45720" anchor="ctr">
+                  <a:tcPr anchor="ctr">
                     <a:lnL w="12700" cap="flat" cmpd="sng" algn="ctr">
                       <a:solidFill>
                         <a:srgbClr val="141B47"/>
@@ -7597,7 +7405,7 @@
                     <a:bodyPr/>
                     <a:lstStyle/>
                     <a:p>
-                      <a:pPr algn="ctr" indent="0" marL="0">
+                      <a:pPr marL="0" indent="0" algn="ctr">
                         <a:buNone/>
                       </a:pPr>
                       <a:r>
@@ -7618,7 +7426,7 @@
                       </a:endParaRPr>
                     </a:p>
                   </a:txBody>
-                  <a:tcPr marL="91440" marR="91440" marT="45720" marB="45720" anchor="ctr">
+                  <a:tcPr anchor="ctr">
                     <a:lnL w="12700" cap="flat" cmpd="sng" algn="ctr">
                       <a:solidFill>
                         <a:srgbClr val="141B47"/>
@@ -7660,6 +7468,11 @@
                     </a:solidFill>
                   </a:tcPr>
                 </a:tc>
+                <a:extLst>
+                  <a:ext uri="{0D108BD9-81ED-4DB2-BD59-A6C34878D82A}">
+                    <a16:rowId xmlns:a16="http://schemas.microsoft.com/office/drawing/2014/main" val="10003"/>
+                  </a:ext>
+                </a:extLst>
               </a:tr>
               <a:tr h="457200">
                 <a:tc>
@@ -7667,7 +7480,7 @@
                     <a:bodyPr/>
                     <a:lstStyle/>
                     <a:p>
-                      <a:pPr algn="ctr" indent="0" marL="0">
+                      <a:pPr marL="0" indent="0" algn="ctr">
                         <a:buNone/>
                       </a:pPr>
                       <a:r>
@@ -7688,7 +7501,7 @@
                       </a:endParaRPr>
                     </a:p>
                   </a:txBody>
-                  <a:tcPr marL="91440" marR="91440" marT="45720" marB="45720" anchor="ctr">
+                  <a:tcPr anchor="ctr">
                     <a:lnL w="12700" cap="flat" cmpd="sng" algn="ctr">
                       <a:solidFill>
                         <a:srgbClr val="141B47"/>
@@ -7735,7 +7548,7 @@
                     <a:bodyPr/>
                     <a:lstStyle/>
                     <a:p>
-                      <a:pPr algn="ctr" indent="0" marL="0">
+                      <a:pPr marL="0" indent="0" algn="ctr">
                         <a:buNone/>
                       </a:pPr>
                       <a:r>
@@ -7756,7 +7569,7 @@
                       </a:endParaRPr>
                     </a:p>
                   </a:txBody>
-                  <a:tcPr marL="91440" marR="91440" marT="45720" marB="45720" anchor="ctr">
+                  <a:tcPr anchor="ctr">
                     <a:lnL w="12700" cap="flat" cmpd="sng" algn="ctr">
                       <a:solidFill>
                         <a:srgbClr val="141B47"/>
@@ -7803,7 +7616,7 @@
                     <a:bodyPr/>
                     <a:lstStyle/>
                     <a:p>
-                      <a:pPr algn="ctr" indent="0" marL="0">
+                      <a:pPr marL="0" indent="0" algn="ctr">
                         <a:buNone/>
                       </a:pPr>
                       <a:r>
@@ -7824,7 +7637,7 @@
                       </a:endParaRPr>
                     </a:p>
                   </a:txBody>
-                  <a:tcPr marL="91440" marR="91440" marT="45720" marB="45720" anchor="ctr">
+                  <a:tcPr anchor="ctr">
                     <a:lnL w="12700" cap="flat" cmpd="sng" algn="ctr">
                       <a:solidFill>
                         <a:srgbClr val="141B47"/>
@@ -7871,7 +7684,7 @@
                     <a:bodyPr/>
                     <a:lstStyle/>
                     <a:p>
-                      <a:pPr algn="ctr" indent="0" marL="0">
+                      <a:pPr marL="0" indent="0" algn="ctr">
                         <a:buNone/>
                       </a:pPr>
                       <a:r>
@@ -7892,7 +7705,7 @@
                       </a:endParaRPr>
                     </a:p>
                   </a:txBody>
-                  <a:tcPr marL="91440" marR="91440" marT="45720" marB="45720" anchor="ctr">
+                  <a:tcPr anchor="ctr">
                     <a:lnL w="12700" cap="flat" cmpd="sng" algn="ctr">
                       <a:solidFill>
                         <a:srgbClr val="141B47"/>
@@ -7934,6 +7747,11 @@
                     </a:solidFill>
                   </a:tcPr>
                 </a:tc>
+                <a:extLst>
+                  <a:ext uri="{0D108BD9-81ED-4DB2-BD59-A6C34878D82A}">
+                    <a16:rowId xmlns:a16="http://schemas.microsoft.com/office/drawing/2014/main" val="10004"/>
+                  </a:ext>
+                </a:extLst>
               </a:tr>
               <a:tr h="457200">
                 <a:tc>
@@ -7941,7 +7759,7 @@
                     <a:bodyPr/>
                     <a:lstStyle/>
                     <a:p>
-                      <a:pPr algn="ctr" indent="0" marL="0">
+                      <a:pPr marL="0" indent="0" algn="ctr">
                         <a:buNone/>
                       </a:pPr>
                       <a:r>
@@ -7962,7 +7780,7 @@
                       </a:endParaRPr>
                     </a:p>
                   </a:txBody>
-                  <a:tcPr marL="91440" marR="91440" marT="45720" marB="45720" anchor="ctr">
+                  <a:tcPr anchor="ctr">
                     <a:lnL w="12700" cap="flat" cmpd="sng" algn="ctr">
                       <a:solidFill>
                         <a:srgbClr val="141B47"/>
@@ -8009,7 +7827,7 @@
                     <a:bodyPr/>
                     <a:lstStyle/>
                     <a:p>
-                      <a:pPr algn="ctr" indent="0" marL="0">
+                      <a:pPr marL="0" indent="0" algn="ctr">
                         <a:buNone/>
                       </a:pPr>
                       <a:r>
@@ -8030,7 +7848,7 @@
                       </a:endParaRPr>
                     </a:p>
                   </a:txBody>
-                  <a:tcPr marL="91440" marR="91440" marT="45720" marB="45720" anchor="ctr">
+                  <a:tcPr anchor="ctr">
                     <a:lnL w="12700" cap="flat" cmpd="sng" algn="ctr">
                       <a:solidFill>
                         <a:srgbClr val="141B47"/>
@@ -8077,7 +7895,7 @@
                     <a:bodyPr/>
                     <a:lstStyle/>
                     <a:p>
-                      <a:pPr algn="ctr" indent="0" marL="0">
+                      <a:pPr marL="0" indent="0" algn="ctr">
                         <a:buNone/>
                       </a:pPr>
                       <a:r>
@@ -8098,7 +7916,7 @@
                       </a:endParaRPr>
                     </a:p>
                   </a:txBody>
-                  <a:tcPr marL="91440" marR="91440" marT="45720" marB="45720" anchor="ctr">
+                  <a:tcPr anchor="ctr">
                     <a:lnL w="12700" cap="flat" cmpd="sng" algn="ctr">
                       <a:solidFill>
                         <a:srgbClr val="141B47"/>
@@ -8145,7 +7963,7 @@
                     <a:bodyPr/>
                     <a:lstStyle/>
                     <a:p>
-                      <a:pPr algn="ctr" indent="0" marL="0">
+                      <a:pPr marL="0" indent="0" algn="ctr">
                         <a:buNone/>
                       </a:pPr>
                       <a:r>
@@ -8166,7 +7984,7 @@
                       </a:endParaRPr>
                     </a:p>
                   </a:txBody>
-                  <a:tcPr marL="91440" marR="91440" marT="45720" marB="45720" anchor="ctr">
+                  <a:tcPr anchor="ctr">
                     <a:lnL w="12700" cap="flat" cmpd="sng" algn="ctr">
                       <a:solidFill>
                         <a:srgbClr val="141B47"/>
@@ -8208,6 +8026,11 @@
                     </a:solidFill>
                   </a:tcPr>
                 </a:tc>
+                <a:extLst>
+                  <a:ext uri="{0D108BD9-81ED-4DB2-BD59-A6C34878D82A}">
+                    <a16:rowId xmlns:a16="http://schemas.microsoft.com/office/drawing/2014/main" val="10005"/>
+                  </a:ext>
+                </a:extLst>
               </a:tr>
             </a:tbl>
           </a:graphicData>
@@ -8215,7 +8038,7 @@
       </p:graphicFrame>
       <p:sp>
         <p:nvSpPr>
-          <p:cNvPr id="8" name="Text 4"/>
+          <p:cNvPr id="7" name="Text 4"/>
           <p:cNvSpPr/>
           <p:nvPr/>
         </p:nvSpPr>
@@ -8234,7 +8057,7 @@
           <a:bodyPr wrap="square" rtlCol="0" anchor="ctr"/>
           <a:lstStyle/>
           <a:p>
-            <a:pPr indent="0" marL="0">
+            <a:pPr marL="0" indent="0">
               <a:buNone/>
             </a:pPr>
             <a:r>
@@ -8293,7 +8116,7 @@
           <a:bodyPr wrap="square" rtlCol="0" anchor="ctr"/>
           <a:lstStyle/>
           <a:p>
-            <a:pPr indent="0" marL="0">
+            <a:pPr marL="0" indent="0">
               <a:buNone/>
             </a:pPr>
             <a:r>
@@ -8352,7 +8175,7 @@
           <a:bodyPr wrap="square" rtlCol="0" anchor="ctr"/>
           <a:lstStyle/>
           <a:p>
-            <a:pPr indent="0" marL="0">
+            <a:pPr marL="0" indent="0">
               <a:buNone/>
             </a:pPr>
             <a:r>
@@ -8411,7 +8234,7 @@
           <a:bodyPr wrap="square" rtlCol="0" anchor="ctr"/>
           <a:lstStyle/>
           <a:p>
-            <a:pPr indent="0" marL="0">
+            <a:pPr marL="0" indent="0">
               <a:buNone/>
             </a:pPr>
             <a:r>
@@ -8450,7 +8273,7 @@
           <a:bodyPr wrap="square" rtlCol="0" anchor="ctr"/>
           <a:lstStyle/>
           <a:p>
-            <a:pPr indent="0" marL="0">
+            <a:pPr marL="0" indent="0">
               <a:buNone/>
             </a:pPr>
             <a:r>
@@ -8489,7 +8312,7 @@
           <a:bodyPr wrap="square" rtlCol="0" anchor="ctr"/>
           <a:lstStyle/>
           <a:p>
-            <a:pPr algn="l" indent="0" marL="0">
+            <a:pPr marL="0" indent="0" algn="l">
               <a:buNone/>
             </a:pPr>
             <a:r>
@@ -8528,7 +8351,7 @@
           <a:bodyPr wrap="square" rtlCol="0" anchor="ctr"/>
           <a:lstStyle/>
           <a:p>
-            <a:pPr algn="r" indent="0" marL="0">
+            <a:pPr marL="0" indent="0" algn="r">
               <a:buNone/>
             </a:pPr>
             <a:r>
@@ -8562,6 +8385,7 @@
         <a:solidFill>
           <a:srgbClr val="FFFFFF"/>
         </a:solidFill>
+        <a:effectLst/>
       </p:bgPr>
     </p:bg>
     <p:spTree>
@@ -8599,7 +8423,7 @@
           <a:bodyPr wrap="square" rtlCol="0" anchor="ctr"/>
           <a:lstStyle/>
           <a:p>
-            <a:pPr indent="0" marL="0">
+            <a:pPr marL="0" indent="0">
               <a:buNone/>
             </a:pPr>
             <a:r>
@@ -8638,7 +8462,7 @@
           <a:bodyPr wrap="square" rtlCol="0" anchor="ctr"/>
           <a:lstStyle/>
           <a:p>
-            <a:pPr indent="0" marL="0">
+            <a:pPr marL="0" indent="0">
               <a:buNone/>
             </a:pPr>
             <a:r>
@@ -8685,15 +8509,15 @@
       </p:sp>
       <p:pic>
         <p:nvPicPr>
-          <p:cNvPr id="5" name="Image 0" descr="dashboard_shot.png">    </p:cNvPr>
+          <p:cNvPr id="5" name="Image 0" descr="dashboard_shot.png"/>
           <p:cNvPicPr>
             <a:picLocks noChangeAspect="1"/>
           </p:cNvPicPr>
           <p:nvPr/>
         </p:nvPicPr>
         <p:blipFill>
-          <a:blip r:embed="rId1"/>
-          <a:srcRect l="0" r="0" t="0" b="0"/>
+          <a:blip r:embed="rId3"/>
+          <a:srcRect/>
           <a:stretch/>
         </p:blipFill>
         <p:spPr>
@@ -8727,7 +8551,7 @@
           <a:bodyPr wrap="square" rtlCol="0" anchor="ctr"/>
           <a:lstStyle/>
           <a:p>
-            <a:pPr algn="l" indent="0" marL="0">
+            <a:pPr marL="0" indent="0" algn="l">
               <a:buNone/>
             </a:pPr>
             <a:r>
@@ -8766,7 +8590,7 @@
           <a:bodyPr wrap="square" rtlCol="0" anchor="ctr"/>
           <a:lstStyle/>
           <a:p>
-            <a:pPr algn="r" indent="0" marL="0">
+            <a:pPr marL="0" indent="0" algn="r">
               <a:buNone/>
             </a:pPr>
             <a:r>
@@ -8800,6 +8624,7 @@
         <a:solidFill>
           <a:srgbClr val="1E2761"/>
         </a:solidFill>
+        <a:effectLst/>
       </p:bgPr>
     </p:bg>
     <p:spTree>
@@ -8837,7 +8662,7 @@
           <a:bodyPr wrap="square" rtlCol="0" anchor="ctr"/>
           <a:lstStyle/>
           <a:p>
-            <a:pPr algn="ctr" indent="0" marL="0">
+            <a:pPr marL="0" indent="0" algn="ctr">
               <a:buNone/>
             </a:pPr>
             <a:r>
@@ -8876,7 +8701,7 @@
           <a:bodyPr wrap="square" rtlCol="0" anchor="ctr"/>
           <a:lstStyle/>
           <a:p>
-            <a:pPr algn="ctr" indent="0" marL="0">
+            <a:pPr marL="0" indent="0" algn="ctr">
               <a:buNone/>
             </a:pPr>
             <a:r>
@@ -8938,217 +8763,7 @@
       </p:sp>
       <p:pic>
         <p:nvPicPr>
-          <p:cNvPr id="6" name="Image 0" descr="icon_users.png">    </p:cNvPr>
-          <p:cNvPicPr>
-            <a:picLocks noChangeAspect="1"/>
-          </p:cNvPicPr>
-          <p:nvPr/>
-        </p:nvPicPr>
-        <p:blipFill>
-          <a:blip r:embed="rId1"/>
-          <a:stretch>
-            <a:fillRect/>
-          </a:stretch>
-        </p:blipFill>
-        <p:spPr>
-          <a:xfrm>
-            <a:off x="2193188" y="2388413"/>
-            <a:ext cx="307238" cy="307238"/>
-          </a:xfrm>
-          <a:prstGeom prst="rect">
-            <a:avLst/>
-          </a:prstGeom>
-        </p:spPr>
-      </p:pic>
-      <p:sp>
-        <p:nvSpPr>
-          <p:cNvPr id="7" name="Text 4"/>
-          <p:cNvSpPr/>
-          <p:nvPr/>
-        </p:nvSpPr>
-        <p:spPr>
-          <a:xfrm>
-            <a:off x="815188" y="2926080"/>
-            <a:ext cx="3063240" cy="685800"/>
-          </a:xfrm>
-          <a:prstGeom prst="rect">
-            <a:avLst/>
-          </a:prstGeom>
-          <a:noFill/>
-          <a:ln/>
-        </p:spPr>
-        <p:txBody>
-          <a:bodyPr wrap="square" rtlCol="0" anchor="t"/>
-          <a:lstStyle/>
-          <a:p>
-            <a:pPr algn="ctr" indent="0" marL="0">
-              <a:buNone/>
-            </a:pPr>
-            <a:r>
-              <a:rPr lang="en-US" sz="1250" dirty="0">
-                <a:solidFill>
-                  <a:srgbClr val="FFFFFF"/>
-                </a:solidFill>
-                <a:latin typeface="Calibri" pitchFamily="34" charset="0"/>
-                <a:ea typeface="Calibri" pitchFamily="34" charset="-122"/>
-                <a:cs typeface="Calibri" pitchFamily="34" charset="-120"/>
-              </a:rPr>
-              <a:t>Segmentation client et profils détaillés</a:t>
-            </a:r>
-            <a:endParaRPr lang="en-US" sz="1250" dirty="0"/>
-          </a:p>
-        </p:txBody>
-      </p:sp>
-      <p:sp>
-        <p:nvSpPr>
-          <p:cNvPr id="8" name="Shape 5"/>
-          <p:cNvSpPr/>
-          <p:nvPr/>
-        </p:nvSpPr>
-        <p:spPr>
-          <a:xfrm>
-            <a:off x="4335628" y="1965960"/>
-            <a:ext cx="3520440" cy="1737360"/>
-          </a:xfrm>
-          <a:prstGeom prst="roundRect">
-            <a:avLst>
-              <a:gd name="adj" fmla="val 4211"/>
-            </a:avLst>
-          </a:prstGeom>
-          <a:solidFill>
-            <a:srgbClr val="2A3373"/>
-          </a:solidFill>
-          <a:ln/>
-        </p:spPr>
-      </p:sp>
-      <p:sp>
-        <p:nvSpPr>
-          <p:cNvPr id="9" name="Shape 6"/>
-          <p:cNvSpPr/>
-          <p:nvPr/>
-        </p:nvSpPr>
-        <p:spPr>
-          <a:xfrm>
-            <a:off x="5775808" y="2221992"/>
-            <a:ext cx="640080" cy="640080"/>
-          </a:xfrm>
-          <a:prstGeom prst="ellipse">
-            <a:avLst/>
-          </a:prstGeom>
-          <a:solidFill>
-            <a:srgbClr val="F4623A"/>
-          </a:solidFill>
-          <a:ln/>
-        </p:spPr>
-      </p:sp>
-      <p:pic>
-        <p:nvPicPr>
-          <p:cNvPr id="10" name="Image 1" descr="icon_trending.png">    </p:cNvPr>
-          <p:cNvPicPr>
-            <a:picLocks noChangeAspect="1"/>
-          </p:cNvPicPr>
-          <p:nvPr/>
-        </p:nvPicPr>
-        <p:blipFill>
-          <a:blip r:embed="rId2"/>
-          <a:stretch>
-            <a:fillRect/>
-          </a:stretch>
-        </p:blipFill>
-        <p:spPr>
-          <a:xfrm>
-            <a:off x="5942228" y="2388413"/>
-            <a:ext cx="307238" cy="307238"/>
-          </a:xfrm>
-          <a:prstGeom prst="rect">
-            <a:avLst/>
-          </a:prstGeom>
-        </p:spPr>
-      </p:pic>
-      <p:sp>
-        <p:nvSpPr>
-          <p:cNvPr id="11" name="Text 7"/>
-          <p:cNvSpPr/>
-          <p:nvPr/>
-        </p:nvSpPr>
-        <p:spPr>
-          <a:xfrm>
-            <a:off x="4564228" y="2926080"/>
-            <a:ext cx="3063240" cy="685800"/>
-          </a:xfrm>
-          <a:prstGeom prst="rect">
-            <a:avLst/>
-          </a:prstGeom>
-          <a:noFill/>
-          <a:ln/>
-        </p:spPr>
-        <p:txBody>
-          <a:bodyPr wrap="square" rtlCol="0" anchor="t"/>
-          <a:lstStyle/>
-          <a:p>
-            <a:pPr algn="ctr" indent="0" marL="0">
-              <a:buNone/>
-            </a:pPr>
-            <a:r>
-              <a:rPr lang="en-US" sz="1250" dirty="0">
-                <a:solidFill>
-                  <a:srgbClr val="FFFFFF"/>
-                </a:solidFill>
-                <a:latin typeface="Calibri" pitchFamily="34" charset="0"/>
-                <a:ea typeface="Calibri" pitchFamily="34" charset="-122"/>
-                <a:cs typeface="Calibri" pitchFamily="34" charset="-120"/>
-              </a:rPr>
-              <a:t>Analyse des campagnes et recommandations</a:t>
-            </a:r>
-            <a:endParaRPr lang="en-US" sz="1250" dirty="0"/>
-          </a:p>
-        </p:txBody>
-      </p:sp>
-      <p:sp>
-        <p:nvSpPr>
-          <p:cNvPr id="12" name="Shape 8"/>
-          <p:cNvSpPr/>
-          <p:nvPr/>
-        </p:nvSpPr>
-        <p:spPr>
-          <a:xfrm>
-            <a:off x="8084668" y="1965960"/>
-            <a:ext cx="3520440" cy="1737360"/>
-          </a:xfrm>
-          <a:prstGeom prst="roundRect">
-            <a:avLst>
-              <a:gd name="adj" fmla="val 4211"/>
-            </a:avLst>
-          </a:prstGeom>
-          <a:solidFill>
-            <a:srgbClr val="2A3373"/>
-          </a:solidFill>
-          <a:ln/>
-        </p:spPr>
-      </p:sp>
-      <p:sp>
-        <p:nvSpPr>
-          <p:cNvPr id="13" name="Shape 9"/>
-          <p:cNvSpPr/>
-          <p:nvPr/>
-        </p:nvSpPr>
-        <p:spPr>
-          <a:xfrm>
-            <a:off x="9524848" y="2221992"/>
-            <a:ext cx="640080" cy="640080"/>
-          </a:xfrm>
-          <a:prstGeom prst="ellipse">
-            <a:avLst/>
-          </a:prstGeom>
-          <a:solidFill>
-            <a:srgbClr val="F4623A"/>
-          </a:solidFill>
-          <a:ln/>
-        </p:spPr>
-      </p:sp>
-      <p:pic>
-        <p:nvPicPr>
-          <p:cNvPr id="14" name="Image 2" descr="icon_alert.png">    </p:cNvPr>
+          <p:cNvPr id="6" name="Image 0" descr="icon_users.png"/>
           <p:cNvPicPr>
             <a:picLocks noChangeAspect="1"/>
           </p:cNvPicPr>
@@ -9162,7 +8777,7 @@
         </p:blipFill>
         <p:spPr>
           <a:xfrm>
-            <a:off x="9691268" y="2388413"/>
+            <a:off x="2193188" y="2388413"/>
             <a:ext cx="307238" cy="307238"/>
           </a:xfrm>
           <a:prstGeom prst="rect">
@@ -9172,13 +8787,13 @@
       </p:pic>
       <p:sp>
         <p:nvSpPr>
-          <p:cNvPr id="15" name="Text 10"/>
-          <p:cNvSpPr/>
-          <p:nvPr/>
-        </p:nvSpPr>
-        <p:spPr>
-          <a:xfrm>
-            <a:off x="8313268" y="2926080"/>
+          <p:cNvPr id="7" name="Text 4"/>
+          <p:cNvSpPr/>
+          <p:nvPr/>
+        </p:nvSpPr>
+        <p:spPr>
+          <a:xfrm>
+            <a:off x="815188" y="2926080"/>
             <a:ext cx="3063240" cy="685800"/>
           </a:xfrm>
           <a:prstGeom prst="rect">
@@ -9191,7 +8806,7 @@
           <a:bodyPr wrap="square" rtlCol="0" anchor="t"/>
           <a:lstStyle/>
           <a:p>
-            <a:pPr algn="ctr" indent="0" marL="0">
+            <a:pPr marL="0" indent="0" algn="ctr">
               <a:buNone/>
             </a:pPr>
             <a:r>
@@ -9203,7 +8818,7 @@
                 <a:ea typeface="Calibri" pitchFamily="34" charset="-122"/>
                 <a:cs typeface="Calibri" pitchFamily="34" charset="-120"/>
               </a:rPr>
-              <a:t>Modèle exploratoire churn / CLV, avec avertissement</a:t>
+              <a:t>Segmentation client et profils détaillés</a:t>
             </a:r>
             <a:endParaRPr lang="en-US" sz="1250" dirty="0"/>
           </a:p>
@@ -9211,13 +8826,13 @@
       </p:sp>
       <p:sp>
         <p:nvSpPr>
-          <p:cNvPr id="16" name="Shape 11"/>
-          <p:cNvSpPr/>
-          <p:nvPr/>
-        </p:nvSpPr>
-        <p:spPr>
-          <a:xfrm>
-            <a:off x="586588" y="3977640"/>
+          <p:cNvPr id="8" name="Shape 5"/>
+          <p:cNvSpPr/>
+          <p:nvPr/>
+        </p:nvSpPr>
+        <p:spPr>
+          <a:xfrm>
+            <a:off x="4335628" y="1965960"/>
             <a:ext cx="3520440" cy="1737360"/>
           </a:xfrm>
           <a:prstGeom prst="roundRect">
@@ -9233,13 +8848,13 @@
       </p:sp>
       <p:sp>
         <p:nvSpPr>
-          <p:cNvPr id="17" name="Shape 12"/>
-          <p:cNvSpPr/>
-          <p:nvPr/>
-        </p:nvSpPr>
-        <p:spPr>
-          <a:xfrm>
-            <a:off x="2026768" y="4233672"/>
+          <p:cNvPr id="9" name="Shape 6"/>
+          <p:cNvSpPr/>
+          <p:nvPr/>
+        </p:nvSpPr>
+        <p:spPr>
+          <a:xfrm>
+            <a:off x="5775808" y="2221992"/>
             <a:ext cx="640080" cy="640080"/>
           </a:xfrm>
           <a:prstGeom prst="ellipse">
@@ -9253,7 +8868,7 @@
       </p:sp>
       <p:pic>
         <p:nvPicPr>
-          <p:cNvPr id="18" name="Image 3" descr="icon_pie.png">    </p:cNvPr>
+          <p:cNvPr id="10" name="Image 1" descr="icon_trending.png"/>
           <p:cNvPicPr>
             <a:picLocks noChangeAspect="1"/>
           </p:cNvPicPr>
@@ -9267,7 +8882,7 @@
         </p:blipFill>
         <p:spPr>
           <a:xfrm>
-            <a:off x="2193188" y="4400093"/>
+            <a:off x="5942228" y="2388413"/>
             <a:ext cx="307238" cy="307238"/>
           </a:xfrm>
           <a:prstGeom prst="rect">
@@ -9277,13 +8892,13 @@
       </p:pic>
       <p:sp>
         <p:nvSpPr>
-          <p:cNvPr id="19" name="Text 13"/>
-          <p:cNvSpPr/>
-          <p:nvPr/>
-        </p:nvSpPr>
-        <p:spPr>
-          <a:xfrm>
-            <a:off x="815188" y="4937760"/>
+          <p:cNvPr id="11" name="Text 7"/>
+          <p:cNvSpPr/>
+          <p:nvPr/>
+        </p:nvSpPr>
+        <p:spPr>
+          <a:xfrm>
+            <a:off x="4564228" y="2926080"/>
             <a:ext cx="3063240" cy="685800"/>
           </a:xfrm>
           <a:prstGeom prst="rect">
@@ -9296,7 +8911,7 @@
           <a:bodyPr wrap="square" rtlCol="0" anchor="t"/>
           <a:lstStyle/>
           <a:p>
-            <a:pPr algn="ctr" indent="0" marL="0">
+            <a:pPr marL="0" indent="0" algn="ctr">
               <a:buNone/>
             </a:pPr>
             <a:r>
@@ -9308,7 +8923,7 @@
                 <a:ea typeface="Calibri" pitchFamily="34" charset="-122"/>
                 <a:cs typeface="Calibri" pitchFamily="34" charset="-120"/>
               </a:rPr>
-              <a:t>Dashboard interactif Streamlit</a:t>
+              <a:t>Analyse des campagnes et recommandations</a:t>
             </a:r>
             <a:endParaRPr lang="en-US" sz="1250" dirty="0"/>
           </a:p>
@@ -9316,13 +8931,13 @@
       </p:sp>
       <p:sp>
         <p:nvSpPr>
-          <p:cNvPr id="20" name="Shape 14"/>
-          <p:cNvSpPr/>
-          <p:nvPr/>
-        </p:nvSpPr>
-        <p:spPr>
-          <a:xfrm>
-            <a:off x="4335628" y="3977640"/>
+          <p:cNvPr id="12" name="Shape 8"/>
+          <p:cNvSpPr/>
+          <p:nvPr/>
+        </p:nvSpPr>
+        <p:spPr>
+          <a:xfrm>
+            <a:off x="8084668" y="1965960"/>
             <a:ext cx="3520440" cy="1737360"/>
           </a:xfrm>
           <a:prstGeom prst="roundRect">
@@ -9338,13 +8953,13 @@
       </p:sp>
       <p:sp>
         <p:nvSpPr>
-          <p:cNvPr id="21" name="Shape 15"/>
-          <p:cNvSpPr/>
-          <p:nvPr/>
-        </p:nvSpPr>
-        <p:spPr>
-          <a:xfrm>
-            <a:off x="5775808" y="4233672"/>
+          <p:cNvPr id="13" name="Shape 9"/>
+          <p:cNvSpPr/>
+          <p:nvPr/>
+        </p:nvSpPr>
+        <p:spPr>
+          <a:xfrm>
+            <a:off x="9524848" y="2221992"/>
             <a:ext cx="640080" cy="640080"/>
           </a:xfrm>
           <a:prstGeom prst="ellipse">
@@ -9358,7 +8973,7 @@
       </p:sp>
       <p:pic>
         <p:nvPicPr>
-          <p:cNvPr id="22" name="Image 4" descr="icon_check.png">    </p:cNvPr>
+          <p:cNvPr id="14" name="Image 2" descr="icon_alert.png"/>
           <p:cNvPicPr>
             <a:picLocks noChangeAspect="1"/>
           </p:cNvPicPr>
@@ -9372,7 +8987,7 @@
         </p:blipFill>
         <p:spPr>
           <a:xfrm>
-            <a:off x="5942228" y="4400093"/>
+            <a:off x="9691268" y="2388413"/>
             <a:ext cx="307238" cy="307238"/>
           </a:xfrm>
           <a:prstGeom prst="rect">
@@ -9382,13 +8997,13 @@
       </p:pic>
       <p:sp>
         <p:nvSpPr>
-          <p:cNvPr id="23" name="Text 16"/>
-          <p:cNvSpPr/>
-          <p:nvPr/>
-        </p:nvSpPr>
-        <p:spPr>
-          <a:xfrm>
-            <a:off x="4564228" y="4937760"/>
+          <p:cNvPr id="15" name="Text 10"/>
+          <p:cNvSpPr/>
+          <p:nvPr/>
+        </p:nvSpPr>
+        <p:spPr>
+          <a:xfrm>
+            <a:off x="8313268" y="2926080"/>
             <a:ext cx="3063240" cy="685800"/>
           </a:xfrm>
           <a:prstGeom prst="rect">
@@ -9401,7 +9016,7 @@
           <a:bodyPr wrap="square" rtlCol="0" anchor="t"/>
           <a:lstStyle/>
           <a:p>
-            <a:pPr algn="ctr" indent="0" marL="0">
+            <a:pPr marL="0" indent="0" algn="ctr">
               <a:buNone/>
             </a:pPr>
             <a:r>
@@ -9413,7 +9028,7 @@
                 <a:ea typeface="Calibri" pitchFamily="34" charset="-122"/>
                 <a:cs typeface="Calibri" pitchFamily="34" charset="-120"/>
               </a:rPr>
-              <a:t>Rapport (Word/PDF) et présentation PowerPoint</a:t>
+              <a:t>Modèle exploratoire churn / CLV, avec avertissement</a:t>
             </a:r>
             <a:endParaRPr lang="en-US" sz="1250" dirty="0"/>
           </a:p>
@@ -9421,37 +9036,247 @@
       </p:sp>
       <p:sp>
         <p:nvSpPr>
-          <p:cNvPr id="24" name="Text 17"/>
-          <p:cNvSpPr/>
-          <p:nvPr/>
-        </p:nvSpPr>
-        <p:spPr>
-          <a:xfrm>
-            <a:off x="457200" y="6528816"/>
-            <a:ext cx="7315200" cy="274320"/>
-          </a:xfrm>
-          <a:prstGeom prst="rect">
-            <a:avLst/>
-          </a:prstGeom>
-          <a:noFill/>
-          <a:ln/>
-        </p:spPr>
-        <p:txBody>
-          <a:bodyPr wrap="square" rtlCol="0" anchor="ctr"/>
-          <a:lstStyle/>
-          <a:p>
-            <a:pPr algn="l" indent="0" marL="0">
-              <a:buNone/>
-            </a:pPr>
-            <a:r>
-              <a:rPr lang="en-US" sz="900" dirty="0">
-                <a:solidFill>
-                  <a:srgbClr val="8892B0"/>
+          <p:cNvPr id="16" name="Shape 11"/>
+          <p:cNvSpPr/>
+          <p:nvPr/>
+        </p:nvSpPr>
+        <p:spPr>
+          <a:xfrm>
+            <a:off x="586588" y="3977640"/>
+            <a:ext cx="3520440" cy="1737360"/>
+          </a:xfrm>
+          <a:prstGeom prst="roundRect">
+            <a:avLst>
+              <a:gd name="adj" fmla="val 4211"/>
+            </a:avLst>
+          </a:prstGeom>
+          <a:solidFill>
+            <a:srgbClr val="2A3373"/>
+          </a:solidFill>
+          <a:ln/>
+        </p:spPr>
+      </p:sp>
+      <p:sp>
+        <p:nvSpPr>
+          <p:cNvPr id="17" name="Shape 12"/>
+          <p:cNvSpPr/>
+          <p:nvPr/>
+        </p:nvSpPr>
+        <p:spPr>
+          <a:xfrm>
+            <a:off x="2026768" y="4233672"/>
+            <a:ext cx="640080" cy="640080"/>
+          </a:xfrm>
+          <a:prstGeom prst="ellipse">
+            <a:avLst/>
+          </a:prstGeom>
+          <a:solidFill>
+            <a:srgbClr val="F4623A"/>
+          </a:solidFill>
+          <a:ln/>
+        </p:spPr>
+      </p:sp>
+      <p:pic>
+        <p:nvPicPr>
+          <p:cNvPr id="18" name="Image 3" descr="icon_pie.png"/>
+          <p:cNvPicPr>
+            <a:picLocks noChangeAspect="1"/>
+          </p:cNvPicPr>
+          <p:nvPr/>
+        </p:nvPicPr>
+        <p:blipFill>
+          <a:blip r:embed="rId6"/>
+          <a:stretch>
+            <a:fillRect/>
+          </a:stretch>
+        </p:blipFill>
+        <p:spPr>
+          <a:xfrm>
+            <a:off x="2193188" y="4400093"/>
+            <a:ext cx="307238" cy="307238"/>
+          </a:xfrm>
+          <a:prstGeom prst="rect">
+            <a:avLst/>
+          </a:prstGeom>
+        </p:spPr>
+      </p:pic>
+      <p:sp>
+        <p:nvSpPr>
+          <p:cNvPr id="19" name="Text 13"/>
+          <p:cNvSpPr/>
+          <p:nvPr/>
+        </p:nvSpPr>
+        <p:spPr>
+          <a:xfrm>
+            <a:off x="815188" y="4937760"/>
+            <a:ext cx="3063240" cy="685800"/>
+          </a:xfrm>
+          <a:prstGeom prst="rect">
+            <a:avLst/>
+          </a:prstGeom>
+          <a:noFill/>
+          <a:ln/>
+        </p:spPr>
+        <p:txBody>
+          <a:bodyPr wrap="square" rtlCol="0" anchor="t"/>
+          <a:lstStyle/>
+          <a:p>
+            <a:pPr marL="0" indent="0" algn="ctr">
+              <a:buNone/>
+            </a:pPr>
+            <a:r>
+              <a:rPr lang="en-US" sz="1250" dirty="0">
+                <a:solidFill>
+                  <a:srgbClr val="FFFFFF"/>
                 </a:solidFill>
                 <a:latin typeface="Calibri" pitchFamily="34" charset="0"/>
                 <a:ea typeface="Calibri" pitchFamily="34" charset="-122"/>
                 <a:cs typeface="Calibri" pitchFamily="34" charset="-120"/>
               </a:rPr>
+              <a:t>Dashboard interactif Streamlit</a:t>
+            </a:r>
+            <a:endParaRPr lang="en-US" sz="1250" dirty="0"/>
+          </a:p>
+        </p:txBody>
+      </p:sp>
+      <p:sp>
+        <p:nvSpPr>
+          <p:cNvPr id="20" name="Shape 14"/>
+          <p:cNvSpPr/>
+          <p:nvPr/>
+        </p:nvSpPr>
+        <p:spPr>
+          <a:xfrm>
+            <a:off x="4335628" y="3977640"/>
+            <a:ext cx="3520440" cy="1737360"/>
+          </a:xfrm>
+          <a:prstGeom prst="roundRect">
+            <a:avLst>
+              <a:gd name="adj" fmla="val 4211"/>
+            </a:avLst>
+          </a:prstGeom>
+          <a:solidFill>
+            <a:srgbClr val="2A3373"/>
+          </a:solidFill>
+          <a:ln/>
+        </p:spPr>
+      </p:sp>
+      <p:sp>
+        <p:nvSpPr>
+          <p:cNvPr id="21" name="Shape 15"/>
+          <p:cNvSpPr/>
+          <p:nvPr/>
+        </p:nvSpPr>
+        <p:spPr>
+          <a:xfrm>
+            <a:off x="5775808" y="4233672"/>
+            <a:ext cx="640080" cy="640080"/>
+          </a:xfrm>
+          <a:prstGeom prst="ellipse">
+            <a:avLst/>
+          </a:prstGeom>
+          <a:solidFill>
+            <a:srgbClr val="F4623A"/>
+          </a:solidFill>
+          <a:ln/>
+        </p:spPr>
+      </p:sp>
+      <p:pic>
+        <p:nvPicPr>
+          <p:cNvPr id="22" name="Image 4" descr="icon_check.png"/>
+          <p:cNvPicPr>
+            <a:picLocks noChangeAspect="1"/>
+          </p:cNvPicPr>
+          <p:nvPr/>
+        </p:nvPicPr>
+        <p:blipFill>
+          <a:blip r:embed="rId7"/>
+          <a:stretch>
+            <a:fillRect/>
+          </a:stretch>
+        </p:blipFill>
+        <p:spPr>
+          <a:xfrm>
+            <a:off x="5942228" y="4400093"/>
+            <a:ext cx="307238" cy="307238"/>
+          </a:xfrm>
+          <a:prstGeom prst="rect">
+            <a:avLst/>
+          </a:prstGeom>
+        </p:spPr>
+      </p:pic>
+      <p:sp>
+        <p:nvSpPr>
+          <p:cNvPr id="23" name="Text 16"/>
+          <p:cNvSpPr/>
+          <p:nvPr/>
+        </p:nvSpPr>
+        <p:spPr>
+          <a:xfrm>
+            <a:off x="4564228" y="4937760"/>
+            <a:ext cx="3063240" cy="685800"/>
+          </a:xfrm>
+          <a:prstGeom prst="rect">
+            <a:avLst/>
+          </a:prstGeom>
+          <a:noFill/>
+          <a:ln/>
+        </p:spPr>
+        <p:txBody>
+          <a:bodyPr wrap="square" rtlCol="0" anchor="t"/>
+          <a:lstStyle/>
+          <a:p>
+            <a:pPr marL="0" indent="0" algn="ctr">
+              <a:buNone/>
+            </a:pPr>
+            <a:r>
+              <a:rPr lang="en-US" sz="1250" dirty="0">
+                <a:solidFill>
+                  <a:srgbClr val="FFFFFF"/>
+                </a:solidFill>
+                <a:latin typeface="Calibri" pitchFamily="34" charset="0"/>
+                <a:ea typeface="Calibri" pitchFamily="34" charset="-122"/>
+                <a:cs typeface="Calibri" pitchFamily="34" charset="-120"/>
+              </a:rPr>
+              <a:t>Rapport (Word/PDF) et présentation PowerPoint</a:t>
+            </a:r>
+            <a:endParaRPr lang="en-US" sz="1250" dirty="0"/>
+          </a:p>
+        </p:txBody>
+      </p:sp>
+      <p:sp>
+        <p:nvSpPr>
+          <p:cNvPr id="24" name="Text 17"/>
+          <p:cNvSpPr/>
+          <p:nvPr/>
+        </p:nvSpPr>
+        <p:spPr>
+          <a:xfrm>
+            <a:off x="457200" y="6528816"/>
+            <a:ext cx="7315200" cy="274320"/>
+          </a:xfrm>
+          <a:prstGeom prst="rect">
+            <a:avLst/>
+          </a:prstGeom>
+          <a:noFill/>
+          <a:ln/>
+        </p:spPr>
+        <p:txBody>
+          <a:bodyPr wrap="square" rtlCol="0" anchor="ctr"/>
+          <a:lstStyle/>
+          <a:p>
+            <a:pPr marL="0" indent="0" algn="l">
+              <a:buNone/>
+            </a:pPr>
+            <a:r>
+              <a:rPr lang="en-US" sz="900" dirty="0">
+                <a:solidFill>
+                  <a:srgbClr val="8892B0"/>
+                </a:solidFill>
+                <a:latin typeface="Calibri" pitchFamily="34" charset="0"/>
+                <a:ea typeface="Calibri" pitchFamily="34" charset="-122"/>
+                <a:cs typeface="Calibri" pitchFamily="34" charset="-120"/>
+              </a:rPr>
               <a:t>Analyse &amp; Optimisation Marketing  •  ENI Fianarantsoa</a:t>
             </a:r>
             <a:endParaRPr lang="en-US" sz="900" dirty="0"/>
@@ -9479,7 +9304,7 @@
           <a:bodyPr wrap="square" rtlCol="0" anchor="ctr"/>
           <a:lstStyle/>
           <a:p>
-            <a:pPr algn="r" indent="0" marL="0">
+            <a:pPr marL="0" indent="0" algn="r">
               <a:buNone/>
             </a:pPr>
             <a:r>
@@ -9798,4 +9623,299 @@
     </a:ext>
   </a:extLst>
 </a:theme>
+</file>
+
+<file path=ppt/theme/theme2.xml><?xml version="1.0" encoding="utf-8"?>
+<a:theme xmlns:a="http://schemas.openxmlformats.org/drawingml/2006/main" name="Thème Office">
+  <a:themeElements>
+    <a:clrScheme name="Office">
+      <a:dk1>
+        <a:sysClr val="windowText" lastClr="000000"/>
+      </a:dk1>
+      <a:lt1>
+        <a:sysClr val="window" lastClr="FFFFFF"/>
+      </a:lt1>
+      <a:dk2>
+        <a:srgbClr val="44546A"/>
+      </a:dk2>
+      <a:lt2>
+        <a:srgbClr val="E7E6E6"/>
+      </a:lt2>
+      <a:accent1>
+        <a:srgbClr val="4472C4"/>
+      </a:accent1>
+      <a:accent2>
+        <a:srgbClr val="ED7D31"/>
+      </a:accent2>
+      <a:accent3>
+        <a:srgbClr val="A5A5A5"/>
+      </a:accent3>
+      <a:accent4>
+        <a:srgbClr val="FFC000"/>
+      </a:accent4>
+      <a:accent5>
+        <a:srgbClr val="5B9BD5"/>
+      </a:accent5>
+      <a:accent6>
+        <a:srgbClr val="70AD47"/>
+      </a:accent6>
+      <a:hlink>
+        <a:srgbClr val="0563C1"/>
+      </a:hlink>
+      <a:folHlink>
+        <a:srgbClr val="954F72"/>
+      </a:folHlink>
+    </a:clrScheme>
+    <a:fontScheme name="Office">
+      <a:majorFont>
+        <a:latin typeface="Calibri Light" panose="020F0302020204030204"/>
+        <a:ea typeface=""/>
+        <a:cs typeface=""/>
+        <a:font script="Jpan" typeface="游ゴシック Light"/>
+        <a:font script="Hang" typeface="맑은 고딕"/>
+        <a:font script="Hans" typeface="等线 Light"/>
+        <a:font script="Hant" typeface="新細明體"/>
+        <a:font script="Arab" typeface="Times New Roman"/>
+        <a:font script="Hebr" typeface="Times New Roman"/>
+        <a:font script="Thai" typeface="Angsana New"/>
+        <a:font script="Ethi" typeface="Nyala"/>
+        <a:font script="Beng" typeface="Vrinda"/>
+        <a:font script="Gujr" typeface="Shruti"/>
+        <a:font script="Khmr" typeface="MoolBoran"/>
+        <a:font script="Knda" typeface="Tunga"/>
+        <a:font script="Guru" typeface="Raavi"/>
+        <a:font script="Cans" typeface="Euphemia"/>
+        <a:font script="Cher" typeface="Plantagenet Cherokee"/>
+        <a:font script="Yiii" typeface="Microsoft Yi Baiti"/>
+        <a:font script="Tibt" typeface="Microsoft Himalaya"/>
+        <a:font script="Thaa" typeface="MV Boli"/>
+        <a:font script="Deva" typeface="Mangal"/>
+        <a:font script="Telu" typeface="Gautami"/>
+        <a:font script="Taml" typeface="Latha"/>
+        <a:font script="Syrc" typeface="Estrangelo Edessa"/>
+        <a:font script="Orya" typeface="Kalinga"/>
+        <a:font script="Mlym" typeface="Kartika"/>
+        <a:font script="Laoo" typeface="DokChampa"/>
+        <a:font script="Sinh" typeface="Iskoola Pota"/>
+        <a:font script="Mong" typeface="Mongolian Baiti"/>
+        <a:font script="Viet" typeface="Times New Roman"/>
+        <a:font script="Uigh" typeface="Microsoft Uighur"/>
+        <a:font script="Geor" typeface="Sylfaen"/>
+        <a:font script="Armn" typeface="Arial"/>
+        <a:font script="Bugi" typeface="Leelawadee UI"/>
+        <a:font script="Bopo" typeface="Microsoft JhengHei"/>
+        <a:font script="Java" typeface="Javanese Text"/>
+        <a:font script="Lisu" typeface="Segoe UI"/>
+        <a:font script="Mymr" typeface="Myanmar Text"/>
+        <a:font script="Nkoo" typeface="Ebrima"/>
+        <a:font script="Olck" typeface="Nirmala UI"/>
+        <a:font script="Osma" typeface="Ebrima"/>
+        <a:font script="Phag" typeface="Phagspa"/>
+        <a:font script="Syrn" typeface="Estrangelo Edessa"/>
+        <a:font script="Syrj" typeface="Estrangelo Edessa"/>
+        <a:font script="Syre" typeface="Estrangelo Edessa"/>
+        <a:font script="Sora" typeface="Nirmala UI"/>
+        <a:font script="Tale" typeface="Microsoft Tai Le"/>
+        <a:font script="Talu" typeface="Microsoft New Tai Lue"/>
+        <a:font script="Tfng" typeface="Ebrima"/>
+      </a:majorFont>
+      <a:minorFont>
+        <a:latin typeface="Calibri" panose="020F0502020204030204"/>
+        <a:ea typeface=""/>
+        <a:cs typeface=""/>
+        <a:font script="Jpan" typeface="游ゴシック"/>
+        <a:font script="Hang" typeface="맑은 고딕"/>
+        <a:font script="Hans" typeface="等线"/>
+        <a:font script="Hant" typeface="新細明體"/>
+        <a:font script="Arab" typeface="Arial"/>
+        <a:font script="Hebr" typeface="Arial"/>
+        <a:font script="Thai" typeface="Cordia New"/>
+        <a:font script="Ethi" typeface="Nyala"/>
+        <a:font script="Beng" typeface="Vrinda"/>
+        <a:font script="Gujr" typeface="Shruti"/>
+        <a:font script="Khmr" typeface="DaunPenh"/>
+        <a:font script="Knda" typeface="Tunga"/>
+        <a:font script="Guru" typeface="Raavi"/>
+        <a:font script="Cans" typeface="Euphemia"/>
+        <a:font script="Cher" typeface="Plantagenet Cherokee"/>
+        <a:font script="Yiii" typeface="Microsoft Yi Baiti"/>
+        <a:font script="Tibt" typeface="Microsoft Himalaya"/>
+        <a:font script="Thaa" typeface="MV Boli"/>
+        <a:font script="Deva" typeface="Mangal"/>
+        <a:font script="Telu" typeface="Gautami"/>
+        <a:font script="Taml" typeface="Latha"/>
+        <a:font script="Syrc" typeface="Estrangelo Edessa"/>
+        <a:font script="Orya" typeface="Kalinga"/>
+        <a:font script="Mlym" typeface="Kartika"/>
+        <a:font script="Laoo" typeface="DokChampa"/>
+        <a:font script="Sinh" typeface="Iskoola Pota"/>
+        <a:font script="Mong" typeface="Mongolian Baiti"/>
+        <a:font script="Viet" typeface="Arial"/>
+        <a:font script="Uigh" typeface="Microsoft Uighur"/>
+        <a:font script="Geor" typeface="Sylfaen"/>
+        <a:font script="Armn" typeface="Arial"/>
+        <a:font script="Bugi" typeface="Leelawadee UI"/>
+        <a:font script="Bopo" typeface="Microsoft JhengHei"/>
+        <a:font script="Java" typeface="Javanese Text"/>
+        <a:font script="Lisu" typeface="Segoe UI"/>
+        <a:font script="Mymr" typeface="Myanmar Text"/>
+        <a:font script="Nkoo" typeface="Ebrima"/>
+        <a:font script="Olck" typeface="Nirmala UI"/>
+        <a:font script="Osma" typeface="Ebrima"/>
+        <a:font script="Phag" typeface="Phagspa"/>
+        <a:font script="Syrn" typeface="Estrangelo Edessa"/>
+        <a:font script="Syrj" typeface="Estrangelo Edessa"/>
+        <a:font script="Syre" typeface="Estrangelo Edessa"/>
+        <a:font script="Sora" typeface="Nirmala UI"/>
+        <a:font script="Tale" typeface="Microsoft Tai Le"/>
+        <a:font script="Talu" typeface="Microsoft New Tai Lue"/>
+        <a:font script="Tfng" typeface="Ebrima"/>
+      </a:minorFont>
+    </a:fontScheme>
+    <a:fmtScheme name="Office">
+      <a:fillStyleLst>
+        <a:solidFill>
+          <a:schemeClr val="phClr"/>
+        </a:solidFill>
+        <a:gradFill rotWithShape="1">
+          <a:gsLst>
+            <a:gs pos="0">
+              <a:schemeClr val="phClr">
+                <a:lumMod val="110000"/>
+                <a:satMod val="105000"/>
+                <a:tint val="67000"/>
+              </a:schemeClr>
+            </a:gs>
+            <a:gs pos="50000">
+              <a:schemeClr val="phClr">
+                <a:lumMod val="105000"/>
+                <a:satMod val="103000"/>
+                <a:tint val="73000"/>
+              </a:schemeClr>
+            </a:gs>
+            <a:gs pos="100000">
+              <a:schemeClr val="phClr">
+                <a:lumMod val="105000"/>
+                <a:satMod val="109000"/>
+                <a:tint val="81000"/>
+              </a:schemeClr>
+            </a:gs>
+          </a:gsLst>
+          <a:lin ang="5400000" scaled="0"/>
+        </a:gradFill>
+        <a:gradFill rotWithShape="1">
+          <a:gsLst>
+            <a:gs pos="0">
+              <a:schemeClr val="phClr">
+                <a:satMod val="103000"/>
+                <a:lumMod val="102000"/>
+                <a:tint val="94000"/>
+              </a:schemeClr>
+            </a:gs>
+            <a:gs pos="50000">
+              <a:schemeClr val="phClr">
+                <a:satMod val="110000"/>
+                <a:lumMod val="100000"/>
+                <a:shade val="100000"/>
+              </a:schemeClr>
+            </a:gs>
+            <a:gs pos="100000">
+              <a:schemeClr val="phClr">
+                <a:lumMod val="99000"/>
+                <a:satMod val="120000"/>
+                <a:shade val="78000"/>
+              </a:schemeClr>
+            </a:gs>
+          </a:gsLst>
+          <a:lin ang="5400000" scaled="0"/>
+        </a:gradFill>
+      </a:fillStyleLst>
+      <a:lnStyleLst>
+        <a:ln w="6350" cap="flat" cmpd="sng" algn="ctr">
+          <a:solidFill>
+            <a:schemeClr val="phClr"/>
+          </a:solidFill>
+          <a:prstDash val="solid"/>
+          <a:miter lim="800000"/>
+        </a:ln>
+        <a:ln w="12700" cap="flat" cmpd="sng" algn="ctr">
+          <a:solidFill>
+            <a:schemeClr val="phClr"/>
+          </a:solidFill>
+          <a:prstDash val="solid"/>
+          <a:miter lim="800000"/>
+        </a:ln>
+        <a:ln w="19050" cap="flat" cmpd="sng" algn="ctr">
+          <a:solidFill>
+            <a:schemeClr val="phClr"/>
+          </a:solidFill>
+          <a:prstDash val="solid"/>
+          <a:miter lim="800000"/>
+        </a:ln>
+      </a:lnStyleLst>
+      <a:effectStyleLst>
+        <a:effectStyle>
+          <a:effectLst/>
+        </a:effectStyle>
+        <a:effectStyle>
+          <a:effectLst/>
+        </a:effectStyle>
+        <a:effectStyle>
+          <a:effectLst>
+            <a:outerShdw blurRad="57150" dist="19050" dir="5400000" algn="ctr" rotWithShape="0">
+              <a:srgbClr val="000000">
+                <a:alpha val="63000"/>
+              </a:srgbClr>
+            </a:outerShdw>
+          </a:effectLst>
+        </a:effectStyle>
+      </a:effectStyleLst>
+      <a:bgFillStyleLst>
+        <a:solidFill>
+          <a:schemeClr val="phClr"/>
+        </a:solidFill>
+        <a:solidFill>
+          <a:schemeClr val="phClr">
+            <a:tint val="95000"/>
+            <a:satMod val="170000"/>
+          </a:schemeClr>
+        </a:solidFill>
+        <a:gradFill rotWithShape="1">
+          <a:gsLst>
+            <a:gs pos="0">
+              <a:schemeClr val="phClr">
+                <a:tint val="93000"/>
+                <a:satMod val="150000"/>
+                <a:shade val="98000"/>
+                <a:lumMod val="102000"/>
+              </a:schemeClr>
+            </a:gs>
+            <a:gs pos="50000">
+              <a:schemeClr val="phClr">
+                <a:tint val="98000"/>
+                <a:satMod val="130000"/>
+                <a:shade val="90000"/>
+                <a:lumMod val="103000"/>
+              </a:schemeClr>
+            </a:gs>
+            <a:gs pos="100000">
+              <a:schemeClr val="phClr">
+                <a:shade val="63000"/>
+                <a:satMod val="120000"/>
+              </a:schemeClr>
+            </a:gs>
+          </a:gsLst>
+          <a:lin ang="5400000" scaled="0"/>
+        </a:gradFill>
+      </a:bgFillStyleLst>
+    </a:fmtScheme>
+  </a:themeElements>
+  <a:objectDefaults/>
+  <a:extraClrSchemeLst/>
+  <a:extLst>
+    <a:ext uri="{05A4C25C-085E-4340-85A3-A5531E510DB2}">
+      <thm15:themeFamily xmlns:thm15="http://schemas.microsoft.com/office/thememl/2012/main" name="Office Theme" id="{62F939B6-93AF-4DB8-9C6B-D6C7DFDC589F}" vid="{4A3C46E8-61CC-4603-A589-7422A47A8E4A}"/>
+    </a:ext>
+  </a:extLst>
+</a:theme>
 </file>